--- a/slides/Module2_Detection.pptx
+++ b/slides/Module2_Detection.pptx
@@ -5,21 +5,21 @@
     <p:sldMasterId id="2147483648" r:id="rId1"/>
   </p:sldMasterIdLst>
   <p:sldIdLst>
-    <p:sldId id="256" r:id="rId7"/>
-    <p:sldId id="257" r:id="rId8"/>
-    <p:sldId id="258" r:id="rId9"/>
-    <p:sldId id="259" r:id="rId10"/>
-    <p:sldId id="260" r:id="rId11"/>
-    <p:sldId id="261" r:id="rId12"/>
-    <p:sldId id="262" r:id="rId13"/>
-    <p:sldId id="263" r:id="rId14"/>
-    <p:sldId id="264" r:id="rId15"/>
-    <p:sldId id="265" r:id="rId16"/>
-    <p:sldId id="266" r:id="rId17"/>
-    <p:sldId id="267" r:id="rId18"/>
-    <p:sldId id="268" r:id="rId19"/>
+    <p:sldId id="256" r:id="rId2"/>
+    <p:sldId id="257" r:id="rId3"/>
+    <p:sldId id="258" r:id="rId4"/>
+    <p:sldId id="259" r:id="rId5"/>
+    <p:sldId id="260" r:id="rId6"/>
+    <p:sldId id="261" r:id="rId7"/>
+    <p:sldId id="262" r:id="rId8"/>
+    <p:sldId id="263" r:id="rId9"/>
+    <p:sldId id="264" r:id="rId10"/>
+    <p:sldId id="265" r:id="rId11"/>
+    <p:sldId id="266" r:id="rId12"/>
+    <p:sldId id="267" r:id="rId13"/>
+    <p:sldId id="268" r:id="rId14"/>
   </p:sldIdLst>
-  <p:sldSz cx="12191695" cy="6858000" type="screen4x3"/>
+  <p:sldSz cx="12192000" cy="6858000"/>
   <p:notesSz cx="6858000" cy="9144000"/>
   <p:defaultTextStyle>
     <a:defPPr>
@@ -116,6 +116,22 @@
       </a:defRPr>
     </a:lvl9pPr>
   </p:defaultTextStyle>
+  <p:extLst>
+    <p:ext uri="{EFAFB233-063F-42B5-8137-9DF3F51BA10A}">
+      <p15:sldGuideLst xmlns:p15="http://schemas.microsoft.com/office/powerpoint/2012/main">
+        <p15:guide id="1" orient="horz" pos="2160">
+          <p15:clr>
+            <a:srgbClr val="A4A3A4"/>
+          </p15:clr>
+        </p15:guide>
+        <p15:guide id="2" pos="2880">
+          <p15:clr>
+            <a:srgbClr val="A4A3A4"/>
+          </p15:clr>
+        </p15:guide>
+      </p15:sldGuideLst>
+    </p:ext>
+  </p:extLst>
 </p:presentation>
 </file>
 
@@ -157,10 +173,9 @@
           <a:lstStyle/>
           <a:p>
             <a:r>
-              <a:rPr lang="en-US" smtClean="0"/>
+              <a:rPr lang="en-US"/>
               <a:t>Click to edit Master title style</a:t>
             </a:r>
-            <a:endParaRPr lang="en-US"/>
           </a:p>
         </p:txBody>
       </p:sp>
@@ -276,10 +291,9 @@
           </a:lstStyle>
           <a:p>
             <a:r>
-              <a:rPr lang="en-US" smtClean="0"/>
+              <a:rPr lang="en-US"/>
               <a:t>Click to edit Master subtitle style</a:t>
             </a:r>
-            <a:endParaRPr lang="en-US"/>
           </a:p>
         </p:txBody>
       </p:sp>
@@ -300,7 +314,7 @@
           <a:p>
             <a:fld id="{5BCAD085-E8A6-8845-BD4E-CB4CCA059FC4}" type="datetimeFigureOut">
               <a:rPr lang="en-US" smtClean="0"/>
-              <a:t>1/27/13</a:t>
+              <a:t>8/20/26</a:t>
             </a:fld>
             <a:endParaRPr lang="en-US"/>
           </a:p>
@@ -394,10 +408,9 @@
           <a:lstStyle/>
           <a:p>
             <a:r>
-              <a:rPr lang="en-US" smtClean="0"/>
+              <a:rPr lang="en-US"/>
               <a:t>Click to edit Master title style</a:t>
             </a:r>
-            <a:endParaRPr lang="en-US"/>
           </a:p>
         </p:txBody>
       </p:sp>
@@ -418,38 +431,37 @@
           <a:p>
             <a:pPr lvl="0"/>
             <a:r>
-              <a:rPr lang="en-US" smtClean="0"/>
+              <a:rPr lang="en-US"/>
               <a:t>Click to edit Master text styles</a:t>
             </a:r>
           </a:p>
           <a:p>
             <a:pPr lvl="1"/>
             <a:r>
-              <a:rPr lang="en-US" smtClean="0"/>
+              <a:rPr lang="en-US"/>
               <a:t>Second level</a:t>
             </a:r>
           </a:p>
           <a:p>
             <a:pPr lvl="2"/>
             <a:r>
-              <a:rPr lang="en-US" smtClean="0"/>
+              <a:rPr lang="en-US"/>
               <a:t>Third level</a:t>
             </a:r>
           </a:p>
           <a:p>
             <a:pPr lvl="3"/>
             <a:r>
-              <a:rPr lang="en-US" smtClean="0"/>
+              <a:rPr lang="en-US"/>
               <a:t>Fourth level</a:t>
             </a:r>
           </a:p>
           <a:p>
             <a:pPr lvl="4"/>
             <a:r>
-              <a:rPr lang="en-US" smtClean="0"/>
+              <a:rPr lang="en-US"/>
               <a:t>Fifth level</a:t>
             </a:r>
-            <a:endParaRPr lang="en-US"/>
           </a:p>
         </p:txBody>
       </p:sp>
@@ -470,7 +482,7 @@
           <a:p>
             <a:fld id="{5BCAD085-E8A6-8845-BD4E-CB4CCA059FC4}" type="datetimeFigureOut">
               <a:rPr lang="en-US" smtClean="0"/>
-              <a:t>1/27/13</a:t>
+              <a:t>8/20/26</a:t>
             </a:fld>
             <a:endParaRPr lang="en-US"/>
           </a:p>
@@ -569,10 +581,9 @@
           <a:lstStyle/>
           <a:p>
             <a:r>
-              <a:rPr lang="en-US" smtClean="0"/>
+              <a:rPr lang="en-US"/>
               <a:t>Click to edit Master title style</a:t>
             </a:r>
-            <a:endParaRPr lang="en-US"/>
           </a:p>
         </p:txBody>
       </p:sp>
@@ -598,38 +609,37 @@
           <a:p>
             <a:pPr lvl="0"/>
             <a:r>
-              <a:rPr lang="en-US" smtClean="0"/>
+              <a:rPr lang="en-US"/>
               <a:t>Click to edit Master text styles</a:t>
             </a:r>
           </a:p>
           <a:p>
             <a:pPr lvl="1"/>
             <a:r>
-              <a:rPr lang="en-US" smtClean="0"/>
+              <a:rPr lang="en-US"/>
               <a:t>Second level</a:t>
             </a:r>
           </a:p>
           <a:p>
             <a:pPr lvl="2"/>
             <a:r>
-              <a:rPr lang="en-US" smtClean="0"/>
+              <a:rPr lang="en-US"/>
               <a:t>Third level</a:t>
             </a:r>
           </a:p>
           <a:p>
             <a:pPr lvl="3"/>
             <a:r>
-              <a:rPr lang="en-US" smtClean="0"/>
+              <a:rPr lang="en-US"/>
               <a:t>Fourth level</a:t>
             </a:r>
           </a:p>
           <a:p>
             <a:pPr lvl="4"/>
             <a:r>
-              <a:rPr lang="en-US" smtClean="0"/>
+              <a:rPr lang="en-US"/>
               <a:t>Fifth level</a:t>
             </a:r>
-            <a:endParaRPr lang="en-US"/>
           </a:p>
         </p:txBody>
       </p:sp>
@@ -650,7 +660,7 @@
           <a:p>
             <a:fld id="{5BCAD085-E8A6-8845-BD4E-CB4CCA059FC4}" type="datetimeFigureOut">
               <a:rPr lang="en-US" smtClean="0"/>
-              <a:t>1/27/13</a:t>
+              <a:t>8/20/26</a:t>
             </a:fld>
             <a:endParaRPr lang="en-US"/>
           </a:p>
@@ -744,10 +754,9 @@
           <a:lstStyle/>
           <a:p>
             <a:r>
-              <a:rPr lang="en-US" smtClean="0"/>
+              <a:rPr lang="en-US"/>
               <a:t>Click to edit Master title style</a:t>
             </a:r>
-            <a:endParaRPr lang="en-US"/>
           </a:p>
         </p:txBody>
       </p:sp>
@@ -768,38 +777,37 @@
           <a:p>
             <a:pPr lvl="0"/>
             <a:r>
-              <a:rPr lang="en-US" smtClean="0"/>
+              <a:rPr lang="en-US"/>
               <a:t>Click to edit Master text styles</a:t>
             </a:r>
           </a:p>
           <a:p>
             <a:pPr lvl="1"/>
             <a:r>
-              <a:rPr lang="en-US" smtClean="0"/>
+              <a:rPr lang="en-US"/>
               <a:t>Second level</a:t>
             </a:r>
           </a:p>
           <a:p>
             <a:pPr lvl="2"/>
             <a:r>
-              <a:rPr lang="en-US" smtClean="0"/>
+              <a:rPr lang="en-US"/>
               <a:t>Third level</a:t>
             </a:r>
           </a:p>
           <a:p>
             <a:pPr lvl="3"/>
             <a:r>
-              <a:rPr lang="en-US" smtClean="0"/>
+              <a:rPr lang="en-US"/>
               <a:t>Fourth level</a:t>
             </a:r>
           </a:p>
           <a:p>
             <a:pPr lvl="4"/>
             <a:r>
-              <a:rPr lang="en-US" smtClean="0"/>
+              <a:rPr lang="en-US"/>
               <a:t>Fifth level</a:t>
             </a:r>
-            <a:endParaRPr lang="en-US"/>
           </a:p>
         </p:txBody>
       </p:sp>
@@ -820,7 +828,7 @@
           <a:p>
             <a:fld id="{5BCAD085-E8A6-8845-BD4E-CB4CCA059FC4}" type="datetimeFigureOut">
               <a:rPr lang="en-US" smtClean="0"/>
-              <a:t>1/27/13</a:t>
+              <a:t>8/20/26</a:t>
             </a:fld>
             <a:endParaRPr lang="en-US"/>
           </a:p>
@@ -923,10 +931,9 @@
           </a:lstStyle>
           <a:p>
             <a:r>
-              <a:rPr lang="en-US" smtClean="0"/>
+              <a:rPr lang="en-US"/>
               <a:t>Click to edit Master title style</a:t>
             </a:r>
-            <a:endParaRPr lang="en-US"/>
           </a:p>
         </p:txBody>
       </p:sp>
@@ -1043,7 +1050,7 @@
           <a:p>
             <a:pPr lvl="0"/>
             <a:r>
-              <a:rPr lang="en-US" smtClean="0"/>
+              <a:rPr lang="en-US"/>
               <a:t>Click to edit Master text styles</a:t>
             </a:r>
           </a:p>
@@ -1066,7 +1073,7 @@
           <a:p>
             <a:fld id="{5BCAD085-E8A6-8845-BD4E-CB4CCA059FC4}" type="datetimeFigureOut">
               <a:rPr lang="en-US" smtClean="0"/>
-              <a:t>1/27/13</a:t>
+              <a:t>8/20/26</a:t>
             </a:fld>
             <a:endParaRPr lang="en-US"/>
           </a:p>
@@ -1160,10 +1167,9 @@
           <a:lstStyle/>
           <a:p>
             <a:r>
-              <a:rPr lang="en-US" smtClean="0"/>
+              <a:rPr lang="en-US"/>
               <a:t>Click to edit Master title style</a:t>
             </a:r>
-            <a:endParaRPr lang="en-US"/>
           </a:p>
         </p:txBody>
       </p:sp>
@@ -1217,38 +1223,37 @@
           <a:p>
             <a:pPr lvl="0"/>
             <a:r>
-              <a:rPr lang="en-US" smtClean="0"/>
+              <a:rPr lang="en-US"/>
               <a:t>Click to edit Master text styles</a:t>
             </a:r>
           </a:p>
           <a:p>
             <a:pPr lvl="1"/>
             <a:r>
-              <a:rPr lang="en-US" smtClean="0"/>
+              <a:rPr lang="en-US"/>
               <a:t>Second level</a:t>
             </a:r>
           </a:p>
           <a:p>
             <a:pPr lvl="2"/>
             <a:r>
-              <a:rPr lang="en-US" smtClean="0"/>
+              <a:rPr lang="en-US"/>
               <a:t>Third level</a:t>
             </a:r>
           </a:p>
           <a:p>
             <a:pPr lvl="3"/>
             <a:r>
-              <a:rPr lang="en-US" smtClean="0"/>
+              <a:rPr lang="en-US"/>
               <a:t>Fourth level</a:t>
             </a:r>
           </a:p>
           <a:p>
             <a:pPr lvl="4"/>
             <a:r>
-              <a:rPr lang="en-US" smtClean="0"/>
+              <a:rPr lang="en-US"/>
               <a:t>Fifth level</a:t>
             </a:r>
-            <a:endParaRPr lang="en-US"/>
           </a:p>
         </p:txBody>
       </p:sp>
@@ -1302,38 +1307,37 @@
           <a:p>
             <a:pPr lvl="0"/>
             <a:r>
-              <a:rPr lang="en-US" smtClean="0"/>
+              <a:rPr lang="en-US"/>
               <a:t>Click to edit Master text styles</a:t>
             </a:r>
           </a:p>
           <a:p>
             <a:pPr lvl="1"/>
             <a:r>
-              <a:rPr lang="en-US" smtClean="0"/>
+              <a:rPr lang="en-US"/>
               <a:t>Second level</a:t>
             </a:r>
           </a:p>
           <a:p>
             <a:pPr lvl="2"/>
             <a:r>
-              <a:rPr lang="en-US" smtClean="0"/>
+              <a:rPr lang="en-US"/>
               <a:t>Third level</a:t>
             </a:r>
           </a:p>
           <a:p>
             <a:pPr lvl="3"/>
             <a:r>
-              <a:rPr lang="en-US" smtClean="0"/>
+              <a:rPr lang="en-US"/>
               <a:t>Fourth level</a:t>
             </a:r>
           </a:p>
           <a:p>
             <a:pPr lvl="4"/>
             <a:r>
-              <a:rPr lang="en-US" smtClean="0"/>
+              <a:rPr lang="en-US"/>
               <a:t>Fifth level</a:t>
             </a:r>
-            <a:endParaRPr lang="en-US"/>
           </a:p>
         </p:txBody>
       </p:sp>
@@ -1354,7 +1358,7 @@
           <a:p>
             <a:fld id="{5BCAD085-E8A6-8845-BD4E-CB4CCA059FC4}" type="datetimeFigureOut">
               <a:rPr lang="en-US" smtClean="0"/>
-              <a:t>1/27/13</a:t>
+              <a:t>8/20/26</a:t>
             </a:fld>
             <a:endParaRPr lang="en-US"/>
           </a:p>
@@ -1452,10 +1456,9 @@
           </a:lstStyle>
           <a:p>
             <a:r>
-              <a:rPr lang="en-US" smtClean="0"/>
+              <a:rPr lang="en-US"/>
               <a:t>Click to edit Master title style</a:t>
             </a:r>
-            <a:endParaRPr lang="en-US"/>
           </a:p>
         </p:txBody>
       </p:sp>
@@ -1518,7 +1521,7 @@
           <a:p>
             <a:pPr lvl="0"/>
             <a:r>
-              <a:rPr lang="en-US" smtClean="0"/>
+              <a:rPr lang="en-US"/>
               <a:t>Click to edit Master text styles</a:t>
             </a:r>
           </a:p>
@@ -1574,38 +1577,37 @@
           <a:p>
             <a:pPr lvl="0"/>
             <a:r>
-              <a:rPr lang="en-US" smtClean="0"/>
+              <a:rPr lang="en-US"/>
               <a:t>Click to edit Master text styles</a:t>
             </a:r>
           </a:p>
           <a:p>
             <a:pPr lvl="1"/>
             <a:r>
-              <a:rPr lang="en-US" smtClean="0"/>
+              <a:rPr lang="en-US"/>
               <a:t>Second level</a:t>
             </a:r>
           </a:p>
           <a:p>
             <a:pPr lvl="2"/>
             <a:r>
-              <a:rPr lang="en-US" smtClean="0"/>
+              <a:rPr lang="en-US"/>
               <a:t>Third level</a:t>
             </a:r>
           </a:p>
           <a:p>
             <a:pPr lvl="3"/>
             <a:r>
-              <a:rPr lang="en-US" smtClean="0"/>
+              <a:rPr lang="en-US"/>
               <a:t>Fourth level</a:t>
             </a:r>
           </a:p>
           <a:p>
             <a:pPr lvl="4"/>
             <a:r>
-              <a:rPr lang="en-US" smtClean="0"/>
+              <a:rPr lang="en-US"/>
               <a:t>Fifth level</a:t>
             </a:r>
-            <a:endParaRPr lang="en-US"/>
           </a:p>
         </p:txBody>
       </p:sp>
@@ -1668,7 +1670,7 @@
           <a:p>
             <a:pPr lvl="0"/>
             <a:r>
-              <a:rPr lang="en-US" smtClean="0"/>
+              <a:rPr lang="en-US"/>
               <a:t>Click to edit Master text styles</a:t>
             </a:r>
           </a:p>
@@ -1724,38 +1726,37 @@
           <a:p>
             <a:pPr lvl="0"/>
             <a:r>
-              <a:rPr lang="en-US" smtClean="0"/>
+              <a:rPr lang="en-US"/>
               <a:t>Click to edit Master text styles</a:t>
             </a:r>
           </a:p>
           <a:p>
             <a:pPr lvl="1"/>
             <a:r>
-              <a:rPr lang="en-US" smtClean="0"/>
+              <a:rPr lang="en-US"/>
               <a:t>Second level</a:t>
             </a:r>
           </a:p>
           <a:p>
             <a:pPr lvl="2"/>
             <a:r>
-              <a:rPr lang="en-US" smtClean="0"/>
+              <a:rPr lang="en-US"/>
               <a:t>Third level</a:t>
             </a:r>
           </a:p>
           <a:p>
             <a:pPr lvl="3"/>
             <a:r>
-              <a:rPr lang="en-US" smtClean="0"/>
+              <a:rPr lang="en-US"/>
               <a:t>Fourth level</a:t>
             </a:r>
           </a:p>
           <a:p>
             <a:pPr lvl="4"/>
             <a:r>
-              <a:rPr lang="en-US" smtClean="0"/>
+              <a:rPr lang="en-US"/>
               <a:t>Fifth level</a:t>
             </a:r>
-            <a:endParaRPr lang="en-US"/>
           </a:p>
         </p:txBody>
       </p:sp>
@@ -1776,7 +1777,7 @@
           <a:p>
             <a:fld id="{5BCAD085-E8A6-8845-BD4E-CB4CCA059FC4}" type="datetimeFigureOut">
               <a:rPr lang="en-US" smtClean="0"/>
-              <a:t>1/27/13</a:t>
+              <a:t>8/20/26</a:t>
             </a:fld>
             <a:endParaRPr lang="en-US"/>
           </a:p>
@@ -1870,10 +1871,9 @@
           <a:lstStyle/>
           <a:p>
             <a:r>
-              <a:rPr lang="en-US" smtClean="0"/>
+              <a:rPr lang="en-US"/>
               <a:t>Click to edit Master title style</a:t>
             </a:r>
-            <a:endParaRPr lang="en-US"/>
           </a:p>
         </p:txBody>
       </p:sp>
@@ -1894,7 +1894,7 @@
           <a:p>
             <a:fld id="{5BCAD085-E8A6-8845-BD4E-CB4CCA059FC4}" type="datetimeFigureOut">
               <a:rPr lang="en-US" smtClean="0"/>
-              <a:t>1/27/13</a:t>
+              <a:t>8/20/26</a:t>
             </a:fld>
             <a:endParaRPr lang="en-US"/>
           </a:p>
@@ -1989,7 +1989,7 @@
           <a:p>
             <a:fld id="{5BCAD085-E8A6-8845-BD4E-CB4CCA059FC4}" type="datetimeFigureOut">
               <a:rPr lang="en-US" smtClean="0"/>
-              <a:t>1/27/13</a:t>
+              <a:t>8/20/26</a:t>
             </a:fld>
             <a:endParaRPr lang="en-US"/>
           </a:p>
@@ -2092,10 +2092,9 @@
           </a:lstStyle>
           <a:p>
             <a:r>
-              <a:rPr lang="en-US" smtClean="0"/>
+              <a:rPr lang="en-US"/>
               <a:t>Click to edit Master title style</a:t>
             </a:r>
-            <a:endParaRPr lang="en-US"/>
           </a:p>
         </p:txBody>
       </p:sp>
@@ -2149,38 +2148,37 @@
           <a:p>
             <a:pPr lvl="0"/>
             <a:r>
-              <a:rPr lang="en-US" smtClean="0"/>
+              <a:rPr lang="en-US"/>
               <a:t>Click to edit Master text styles</a:t>
             </a:r>
           </a:p>
           <a:p>
             <a:pPr lvl="1"/>
             <a:r>
-              <a:rPr lang="en-US" smtClean="0"/>
+              <a:rPr lang="en-US"/>
               <a:t>Second level</a:t>
             </a:r>
           </a:p>
           <a:p>
             <a:pPr lvl="2"/>
             <a:r>
-              <a:rPr lang="en-US" smtClean="0"/>
+              <a:rPr lang="en-US"/>
               <a:t>Third level</a:t>
             </a:r>
           </a:p>
           <a:p>
             <a:pPr lvl="3"/>
             <a:r>
-              <a:rPr lang="en-US" smtClean="0"/>
+              <a:rPr lang="en-US"/>
               <a:t>Fourth level</a:t>
             </a:r>
           </a:p>
           <a:p>
             <a:pPr lvl="4"/>
             <a:r>
-              <a:rPr lang="en-US" smtClean="0"/>
+              <a:rPr lang="en-US"/>
               <a:t>Fifth level</a:t>
             </a:r>
-            <a:endParaRPr lang="en-US"/>
           </a:p>
         </p:txBody>
       </p:sp>
@@ -2243,7 +2241,7 @@
           <a:p>
             <a:pPr lvl="0"/>
             <a:r>
-              <a:rPr lang="en-US" smtClean="0"/>
+              <a:rPr lang="en-US"/>
               <a:t>Click to edit Master text styles</a:t>
             </a:r>
           </a:p>
@@ -2266,7 +2264,7 @@
           <a:p>
             <a:fld id="{5BCAD085-E8A6-8845-BD4E-CB4CCA059FC4}" type="datetimeFigureOut">
               <a:rPr lang="en-US" smtClean="0"/>
-              <a:t>1/27/13</a:t>
+              <a:t>8/20/26</a:t>
             </a:fld>
             <a:endParaRPr lang="en-US"/>
           </a:p>
@@ -2369,10 +2367,9 @@
           </a:lstStyle>
           <a:p>
             <a:r>
-              <a:rPr lang="en-US" smtClean="0"/>
+              <a:rPr lang="en-US"/>
               <a:t>Click to edit Master title style</a:t>
             </a:r>
-            <a:endParaRPr lang="en-US"/>
           </a:p>
         </p:txBody>
       </p:sp>
@@ -2496,7 +2493,7 @@
           <a:p>
             <a:pPr lvl="0"/>
             <a:r>
-              <a:rPr lang="en-US" smtClean="0"/>
+              <a:rPr lang="en-US"/>
               <a:t>Click to edit Master text styles</a:t>
             </a:r>
           </a:p>
@@ -2519,7 +2516,7 @@
           <a:p>
             <a:fld id="{5BCAD085-E8A6-8845-BD4E-CB4CCA059FC4}" type="datetimeFigureOut">
               <a:rPr lang="en-US" smtClean="0"/>
-              <a:t>1/27/13</a:t>
+              <a:t>8/20/26</a:t>
             </a:fld>
             <a:endParaRPr lang="en-US"/>
           </a:p>
@@ -2628,10 +2625,9 @@
           <a:lstStyle/>
           <a:p>
             <a:r>
-              <a:rPr lang="en-US" smtClean="0"/>
+              <a:rPr lang="en-US"/>
               <a:t>Click to edit Master title style</a:t>
             </a:r>
-            <a:endParaRPr lang="en-US"/>
           </a:p>
         </p:txBody>
       </p:sp>
@@ -2662,38 +2658,37 @@
           <a:p>
             <a:pPr lvl="0"/>
             <a:r>
-              <a:rPr lang="en-US" smtClean="0"/>
+              <a:rPr lang="en-US"/>
               <a:t>Click to edit Master text styles</a:t>
             </a:r>
           </a:p>
           <a:p>
             <a:pPr lvl="1"/>
             <a:r>
-              <a:rPr lang="en-US" smtClean="0"/>
+              <a:rPr lang="en-US"/>
               <a:t>Second level</a:t>
             </a:r>
           </a:p>
           <a:p>
             <a:pPr lvl="2"/>
             <a:r>
-              <a:rPr lang="en-US" smtClean="0"/>
+              <a:rPr lang="en-US"/>
               <a:t>Third level</a:t>
             </a:r>
           </a:p>
           <a:p>
             <a:pPr lvl="3"/>
             <a:r>
-              <a:rPr lang="en-US" smtClean="0"/>
+              <a:rPr lang="en-US"/>
               <a:t>Fourth level</a:t>
             </a:r>
           </a:p>
           <a:p>
             <a:pPr lvl="4"/>
             <a:r>
-              <a:rPr lang="en-US" smtClean="0"/>
+              <a:rPr lang="en-US"/>
               <a:t>Fifth level</a:t>
             </a:r>
-            <a:endParaRPr lang="en-US"/>
           </a:p>
         </p:txBody>
       </p:sp>
@@ -2732,7 +2727,7 @@
           <a:p>
             <a:fld id="{5BCAD085-E8A6-8845-BD4E-CB4CCA059FC4}" type="datetimeFigureOut">
               <a:rPr lang="en-US" smtClean="0"/>
-              <a:t>1/27/13</a:t>
+              <a:t>8/20/26</a:t>
             </a:fld>
             <a:endParaRPr lang="en-US"/>
           </a:p>
@@ -3091,7 +3086,7 @@
 </file>
 
 <file path=ppt/slides/slide1.xml><?xml version="1.0" encoding="utf-8"?>
-<p:sld xmlns:a="http://schemas.openxmlformats.org/drawingml/2006/main" xmlns:p="http://schemas.openxmlformats.org/presentationml/2006/main" xmlns:r="http://schemas.openxmlformats.org/officeDocument/2006/relationships">
+<p:sld xmlns:a="http://schemas.openxmlformats.org/drawingml/2006/main" xmlns:r="http://schemas.openxmlformats.org/officeDocument/2006/relationships" xmlns:p="http://schemas.openxmlformats.org/presentationml/2006/main">
   <p:cSld>
     <p:spTree>
       <p:nvGrpSpPr>
@@ -3099,7 +3094,14 @@
         <p:cNvGrpSpPr/>
         <p:nvPr/>
       </p:nvGrpSpPr>
-      <p:grpSpPr/>
+      <p:grpSpPr>
+        <a:xfrm>
+          <a:off x="0" y="0"/>
+          <a:ext cx="0" cy="0"/>
+          <a:chOff x="0" y="0"/>
+          <a:chExt cx="0" cy="0"/>
+        </a:xfrm>
+      </p:grpSpPr>
       <p:sp>
         <p:nvSpPr>
           <p:cNvPr id="2" name="Rectangle 1"/>
@@ -3141,6 +3143,7 @@
           <a:lstStyle/>
           <a:p>
             <a:pPr algn="ctr"/>
+            <a:endParaRPr/>
           </a:p>
         </p:txBody>
       </p:sp>
@@ -3185,6 +3188,7 @@
           <a:lstStyle/>
           <a:p>
             <a:pPr algn="ctr"/>
+            <a:endParaRPr/>
           </a:p>
         </p:txBody>
       </p:sp>
@@ -3229,6 +3233,7 @@
           <a:lstStyle/>
           <a:p>
             <a:pPr algn="ctr"/>
+            <a:endParaRPr/>
           </a:p>
         </p:txBody>
       </p:sp>
@@ -3253,13 +3258,6 @@
             <a:noFill/>
           </a:ln>
           <a:effectLst/>
-          <a:effectLst>
-            <a:outerShdw blurRad="60000" dist="25000" dir="5400000" rotWithShape="0">
-              <a:srgbClr val="1A1A2E">
-                <a:alpha val="22000"/>
-              </a:srgbClr>
-            </a:outerShdw>
-          </a:effectLst>
         </p:spPr>
         <p:style>
           <a:lnRef idx="1">
@@ -3280,6 +3278,7 @@
           <a:lstStyle/>
           <a:p>
             <a:pPr algn="ctr"/>
+            <a:endParaRPr/>
           </a:p>
         </p:txBody>
       </p:sp>
@@ -3324,6 +3323,7 @@
           <a:lstStyle/>
           <a:p>
             <a:pPr algn="ctr"/>
+            <a:endParaRPr/>
           </a:p>
         </p:txBody>
       </p:sp>
@@ -3344,7 +3344,7 @@
           <a:noFill/>
         </p:spPr>
         <p:txBody>
-          <a:bodyPr wrap="square" anchor="ctr" lIns="109728" rIns="109728" tIns="54864" bIns="54864">
+          <a:bodyPr wrap="square" lIns="109728" tIns="54864" rIns="109728" bIns="54864" anchor="ctr">
             <a:spAutoFit/>
           </a:bodyPr>
           <a:lstStyle/>
@@ -3405,7 +3405,7 @@
           <a:noFill/>
         </p:spPr>
         <p:txBody>
-          <a:bodyPr wrap="square" anchor="t" lIns="109728" rIns="109728" tIns="54864" bIns="54864">
+          <a:bodyPr wrap="square" lIns="109728" tIns="54864" rIns="109728" bIns="54864" anchor="t">
             <a:spAutoFit/>
           </a:bodyPr>
           <a:lstStyle/>
@@ -3447,7 +3447,7 @@
           <a:noFill/>
         </p:spPr>
         <p:txBody>
-          <a:bodyPr wrap="square" anchor="t" lIns="109728" rIns="109728" tIns="54864" bIns="54864">
+          <a:bodyPr wrap="square" lIns="109728" tIns="54864" rIns="109728" bIns="54864" anchor="t">
             <a:spAutoFit/>
           </a:bodyPr>
           <a:lstStyle/>
@@ -3489,7 +3489,7 @@
           <a:noFill/>
         </p:spPr>
         <p:txBody>
-          <a:bodyPr wrap="square" anchor="t" lIns="109728" rIns="109728" tIns="54864" bIns="54864">
+          <a:bodyPr wrap="square" lIns="109728" tIns="54864" rIns="109728" bIns="54864" anchor="t">
             <a:spAutoFit/>
           </a:bodyPr>
           <a:lstStyle/>
@@ -3531,7 +3531,7 @@
           <a:noFill/>
         </p:spPr>
         <p:txBody>
-          <a:bodyPr wrap="square" anchor="t" lIns="109728" rIns="109728" tIns="54864" bIns="54864">
+          <a:bodyPr wrap="square" lIns="109728" tIns="54864" rIns="109728" bIns="54864" anchor="t">
             <a:spAutoFit/>
           </a:bodyPr>
           <a:lstStyle/>
@@ -3595,7 +3595,7 @@
           </a:fontRef>
         </p:style>
         <p:txBody>
-          <a:bodyPr rtlCol="0" anchor="ctr" wrap="square" lIns="109728" rIns="109728" tIns="54864" bIns="54864"/>
+          <a:bodyPr wrap="square" lIns="109728" tIns="54864" rIns="109728" bIns="54864" rtlCol="0" anchor="ctr"/>
           <a:lstStyle/>
           <a:p>
             <a:pPr algn="ctr">
@@ -3657,7 +3657,7 @@
           </a:fontRef>
         </p:style>
         <p:txBody>
-          <a:bodyPr rtlCol="0" anchor="ctr" wrap="square" lIns="109728" rIns="109728" tIns="54864" bIns="54864"/>
+          <a:bodyPr wrap="square" lIns="109728" tIns="54864" rIns="109728" bIns="54864" rtlCol="0" anchor="ctr"/>
           <a:lstStyle/>
           <a:p>
             <a:pPr algn="ctr">
@@ -3719,7 +3719,7 @@
           </a:fontRef>
         </p:style>
         <p:txBody>
-          <a:bodyPr rtlCol="0" anchor="ctr" wrap="square" lIns="109728" rIns="109728" tIns="54864" bIns="54864"/>
+          <a:bodyPr wrap="square" lIns="109728" tIns="54864" rIns="109728" bIns="54864" rtlCol="0" anchor="ctr"/>
           <a:lstStyle/>
           <a:p>
             <a:pPr algn="ctr">
@@ -3759,7 +3759,7 @@
           <a:noFill/>
         </p:spPr>
         <p:txBody>
-          <a:bodyPr wrap="square" anchor="t" lIns="109728" rIns="109728" tIns="54864" bIns="54864">
+          <a:bodyPr wrap="square" lIns="109728" tIns="54864" rIns="109728" bIns="54864" anchor="t">
             <a:spAutoFit/>
           </a:bodyPr>
           <a:lstStyle/>
@@ -3784,6 +3784,36 @@
           </a:p>
         </p:txBody>
       </p:sp>
+      <p:pic>
+        <p:nvPicPr>
+          <p:cNvPr id="17" name="Picture 16" descr="Evolve Security 2026 Company Profile: Valuation, Funding &amp; Investors |  PitchBook">
+            <a:extLst>
+              <a:ext uri="{FF2B5EF4-FFF2-40B4-BE49-F238E27FC236}">
+                <a16:creationId xmlns:a16="http://schemas.microsoft.com/office/drawing/2014/main" id="{B3B53DDB-7294-3F09-4A26-F8D75A502BD1}"/>
+              </a:ext>
+            </a:extLst>
+          </p:cNvPr>
+          <p:cNvPicPr>
+            <a:picLocks noChangeAspect="1"/>
+          </p:cNvPicPr>
+          <p:nvPr/>
+        </p:nvPicPr>
+        <p:blipFill>
+          <a:blip r:embed="rId2"/>
+          <a:stretch>
+            <a:fillRect/>
+          </a:stretch>
+        </p:blipFill>
+        <p:spPr>
+          <a:xfrm>
+            <a:off x="3927856" y="-320358"/>
+            <a:ext cx="1787144" cy="1787144"/>
+          </a:xfrm>
+          <a:prstGeom prst="rect">
+            <a:avLst/>
+          </a:prstGeom>
+        </p:spPr>
+      </p:pic>
     </p:spTree>
   </p:cSld>
   <p:clrMapOvr>
@@ -3793,7 +3823,7 @@
 </file>
 
 <file path=ppt/slides/slide10.xml><?xml version="1.0" encoding="utf-8"?>
-<p:sld xmlns:a="http://schemas.openxmlformats.org/drawingml/2006/main" xmlns:p="http://schemas.openxmlformats.org/presentationml/2006/main" xmlns:r="http://schemas.openxmlformats.org/officeDocument/2006/relationships">
+<p:sld xmlns:a="http://schemas.openxmlformats.org/drawingml/2006/main" xmlns:r="http://schemas.openxmlformats.org/officeDocument/2006/relationships" xmlns:p="http://schemas.openxmlformats.org/presentationml/2006/main">
   <p:cSld>
     <p:spTree>
       <p:nvGrpSpPr>
@@ -3801,7 +3831,14 @@
         <p:cNvGrpSpPr/>
         <p:nvPr/>
       </p:nvGrpSpPr>
-      <p:grpSpPr/>
+      <p:grpSpPr>
+        <a:xfrm>
+          <a:off x="0" y="0"/>
+          <a:ext cx="0" cy="0"/>
+          <a:chOff x="0" y="0"/>
+          <a:chExt cx="0" cy="0"/>
+        </a:xfrm>
+      </p:grpSpPr>
       <p:sp>
         <p:nvSpPr>
           <p:cNvPr id="2" name="Rectangle 1"/>
@@ -3843,6 +3880,7 @@
           <a:lstStyle/>
           <a:p>
             <a:pPr algn="ctr"/>
+            <a:endParaRPr/>
           </a:p>
         </p:txBody>
       </p:sp>
@@ -3887,6 +3925,7 @@
           <a:lstStyle/>
           <a:p>
             <a:pPr algn="ctr"/>
+            <a:endParaRPr/>
           </a:p>
         </p:txBody>
       </p:sp>
@@ -3907,7 +3946,7 @@
           <a:noFill/>
         </p:spPr>
         <p:txBody>
-          <a:bodyPr wrap="square" anchor="t" lIns="109728" rIns="109728" tIns="54864" bIns="54864">
+          <a:bodyPr wrap="square" lIns="109728" tIns="54864" rIns="109728" bIns="54864" anchor="t">
             <a:spAutoFit/>
           </a:bodyPr>
           <a:lstStyle/>
@@ -3949,7 +3988,7 @@
           <a:noFill/>
         </p:spPr>
         <p:txBody>
-          <a:bodyPr wrap="square" anchor="ctr" lIns="109728" rIns="109728" tIns="54864" bIns="54864">
+          <a:bodyPr wrap="square" lIns="109728" tIns="54864" rIns="109728" bIns="54864" anchor="ctr">
             <a:spAutoFit/>
           </a:bodyPr>
           <a:lstStyle/>
@@ -4015,6 +4054,7 @@
           <a:lstStyle/>
           <a:p>
             <a:pPr algn="ctr"/>
+            <a:endParaRPr/>
           </a:p>
         </p:txBody>
       </p:sp>
@@ -4035,7 +4075,7 @@
           <a:noFill/>
         </p:spPr>
         <p:txBody>
-          <a:bodyPr wrap="square" anchor="ctr" lIns="109728" rIns="109728" tIns="54864" bIns="54864">
+          <a:bodyPr wrap="square" lIns="109728" tIns="54864" rIns="109728" bIns="54864" anchor="ctr">
             <a:spAutoFit/>
           </a:bodyPr>
           <a:lstStyle/>
@@ -4077,7 +4117,7 @@
           <a:noFill/>
         </p:spPr>
         <p:txBody>
-          <a:bodyPr wrap="square" anchor="ctr" lIns="109728" rIns="109728" tIns="54864" bIns="54864">
+          <a:bodyPr wrap="square" lIns="109728" tIns="54864" rIns="109728" bIns="54864" anchor="ctr">
             <a:spAutoFit/>
           </a:bodyPr>
           <a:lstStyle/>
@@ -4123,13 +4163,6 @@
             <a:noFill/>
           </a:ln>
           <a:effectLst/>
-          <a:effectLst>
-            <a:outerShdw blurRad="60000" dist="25000" dir="5400000" rotWithShape="0">
-              <a:srgbClr val="1A1A2E">
-                <a:alpha val="22000"/>
-              </a:srgbClr>
-            </a:outerShdw>
-          </a:effectLst>
         </p:spPr>
         <p:style>
           <a:lnRef idx="1">
@@ -4150,6 +4183,7 @@
           <a:lstStyle/>
           <a:p>
             <a:pPr algn="ctr"/>
+            <a:endParaRPr/>
           </a:p>
         </p:txBody>
       </p:sp>
@@ -4170,7 +4204,7 @@
           <a:noFill/>
         </p:spPr>
         <p:txBody>
-          <a:bodyPr wrap="square" anchor="ctr" lIns="109728" rIns="109728" tIns="54864" bIns="54864">
+          <a:bodyPr wrap="square" lIns="109728" tIns="54864" rIns="109728" bIns="54864" anchor="ctr">
             <a:spAutoFit/>
           </a:bodyPr>
           <a:lstStyle/>
@@ -4235,13 +4269,6 @@
             <a:noFill/>
           </a:ln>
           <a:effectLst/>
-          <a:effectLst>
-            <a:outerShdw blurRad="60000" dist="25000" dir="5400000" rotWithShape="0">
-              <a:srgbClr val="1A1A2E">
-                <a:alpha val="22000"/>
-              </a:srgbClr>
-            </a:outerShdw>
-          </a:effectLst>
         </p:spPr>
         <p:style>
           <a:lnRef idx="1">
@@ -4262,6 +4289,7 @@
           <a:lstStyle/>
           <a:p>
             <a:pPr algn="ctr"/>
+            <a:endParaRPr/>
           </a:p>
         </p:txBody>
       </p:sp>
@@ -4282,7 +4310,7 @@
           <a:noFill/>
         </p:spPr>
         <p:txBody>
-          <a:bodyPr wrap="square" anchor="ctr" lIns="109728" rIns="109728" tIns="54864" bIns="54864">
+          <a:bodyPr wrap="square" lIns="109728" tIns="54864" rIns="109728" bIns="54864" anchor="ctr">
             <a:spAutoFit/>
           </a:bodyPr>
           <a:lstStyle/>
@@ -4347,13 +4375,6 @@
             <a:noFill/>
           </a:ln>
           <a:effectLst/>
-          <a:effectLst>
-            <a:outerShdw blurRad="60000" dist="25000" dir="5400000" rotWithShape="0">
-              <a:srgbClr val="1A1A2E">
-                <a:alpha val="22000"/>
-              </a:srgbClr>
-            </a:outerShdw>
-          </a:effectLst>
         </p:spPr>
         <p:style>
           <a:lnRef idx="1">
@@ -4374,6 +4395,7 @@
           <a:lstStyle/>
           <a:p>
             <a:pPr algn="ctr"/>
+            <a:endParaRPr/>
           </a:p>
         </p:txBody>
       </p:sp>
@@ -4394,7 +4416,7 @@
           <a:noFill/>
         </p:spPr>
         <p:txBody>
-          <a:bodyPr wrap="square" anchor="ctr" lIns="109728" rIns="109728" tIns="54864" bIns="54864">
+          <a:bodyPr wrap="square" lIns="109728" tIns="54864" rIns="109728" bIns="54864" anchor="ctr">
             <a:spAutoFit/>
           </a:bodyPr>
           <a:lstStyle/>
@@ -4459,13 +4481,6 @@
             <a:noFill/>
           </a:ln>
           <a:effectLst/>
-          <a:effectLst>
-            <a:outerShdw blurRad="60000" dist="25000" dir="5400000" rotWithShape="0">
-              <a:srgbClr val="1A1A2E">
-                <a:alpha val="22000"/>
-              </a:srgbClr>
-            </a:outerShdw>
-          </a:effectLst>
         </p:spPr>
         <p:style>
           <a:lnRef idx="1">
@@ -4486,6 +4501,7 @@
           <a:lstStyle/>
           <a:p>
             <a:pPr algn="ctr"/>
+            <a:endParaRPr/>
           </a:p>
         </p:txBody>
       </p:sp>
@@ -4506,7 +4522,7 @@
           <a:noFill/>
         </p:spPr>
         <p:txBody>
-          <a:bodyPr wrap="square" anchor="ctr" lIns="109728" rIns="109728" tIns="54864" bIns="54864">
+          <a:bodyPr wrap="square" lIns="109728" tIns="54864" rIns="109728" bIns="54864" anchor="ctr">
             <a:spAutoFit/>
           </a:bodyPr>
           <a:lstStyle/>
@@ -4567,7 +4583,7 @@
           <a:noFill/>
         </p:spPr>
         <p:txBody>
-          <a:bodyPr wrap="square" anchor="t" lIns="109728" rIns="109728" tIns="54864" bIns="54864">
+          <a:bodyPr wrap="square" lIns="109728" tIns="54864" rIns="109728" bIns="54864" anchor="t">
             <a:spAutoFit/>
           </a:bodyPr>
           <a:lstStyle/>
@@ -4601,7 +4617,7 @@
 </file>
 
 <file path=ppt/slides/slide11.xml><?xml version="1.0" encoding="utf-8"?>
-<p:sld xmlns:a="http://schemas.openxmlformats.org/drawingml/2006/main" xmlns:p="http://schemas.openxmlformats.org/presentationml/2006/main" xmlns:r="http://schemas.openxmlformats.org/officeDocument/2006/relationships">
+<p:sld xmlns:a="http://schemas.openxmlformats.org/drawingml/2006/main" xmlns:r="http://schemas.openxmlformats.org/officeDocument/2006/relationships" xmlns:p="http://schemas.openxmlformats.org/presentationml/2006/main">
   <p:cSld>
     <p:spTree>
       <p:nvGrpSpPr>
@@ -4609,7 +4625,14 @@
         <p:cNvGrpSpPr/>
         <p:nvPr/>
       </p:nvGrpSpPr>
-      <p:grpSpPr/>
+      <p:grpSpPr>
+        <a:xfrm>
+          <a:off x="0" y="0"/>
+          <a:ext cx="0" cy="0"/>
+          <a:chOff x="0" y="0"/>
+          <a:chExt cx="0" cy="0"/>
+        </a:xfrm>
+      </p:grpSpPr>
       <p:sp>
         <p:nvSpPr>
           <p:cNvPr id="2" name="Rectangle 1"/>
@@ -4651,6 +4674,7 @@
           <a:lstStyle/>
           <a:p>
             <a:pPr algn="ctr"/>
+            <a:endParaRPr/>
           </a:p>
         </p:txBody>
       </p:sp>
@@ -4695,6 +4719,7 @@
           <a:lstStyle/>
           <a:p>
             <a:pPr algn="ctr"/>
+            <a:endParaRPr/>
           </a:p>
         </p:txBody>
       </p:sp>
@@ -4715,7 +4740,7 @@
           <a:noFill/>
         </p:spPr>
         <p:txBody>
-          <a:bodyPr wrap="square" anchor="t" lIns="109728" rIns="109728" tIns="54864" bIns="54864">
+          <a:bodyPr wrap="square" lIns="109728" tIns="54864" rIns="109728" bIns="54864" anchor="t">
             <a:spAutoFit/>
           </a:bodyPr>
           <a:lstStyle/>
@@ -4757,7 +4782,7 @@
           <a:noFill/>
         </p:spPr>
         <p:txBody>
-          <a:bodyPr wrap="square" anchor="ctr" lIns="109728" rIns="109728" tIns="54864" bIns="54864">
+          <a:bodyPr wrap="square" lIns="109728" tIns="54864" rIns="109728" bIns="54864" anchor="ctr">
             <a:spAutoFit/>
           </a:bodyPr>
           <a:lstStyle/>
@@ -4823,6 +4848,7 @@
           <a:lstStyle/>
           <a:p>
             <a:pPr algn="ctr"/>
+            <a:endParaRPr/>
           </a:p>
         </p:txBody>
       </p:sp>
@@ -4843,7 +4869,7 @@
           <a:noFill/>
         </p:spPr>
         <p:txBody>
-          <a:bodyPr wrap="square" anchor="ctr" lIns="109728" rIns="109728" tIns="54864" bIns="54864">
+          <a:bodyPr wrap="square" lIns="109728" tIns="54864" rIns="109728" bIns="54864" anchor="ctr">
             <a:spAutoFit/>
           </a:bodyPr>
           <a:lstStyle/>
@@ -4885,7 +4911,7 @@
           <a:noFill/>
         </p:spPr>
         <p:txBody>
-          <a:bodyPr wrap="square" anchor="ctr" lIns="109728" rIns="109728" tIns="54864" bIns="54864">
+          <a:bodyPr wrap="square" lIns="109728" tIns="54864" rIns="109728" bIns="54864" anchor="ctr">
             <a:spAutoFit/>
           </a:bodyPr>
           <a:lstStyle/>
@@ -4927,7 +4953,7 @@
           <a:noFill/>
         </p:spPr>
         <p:txBody>
-          <a:bodyPr wrap="square" anchor="t" lIns="109728" rIns="109728" tIns="54864" bIns="54864">
+          <a:bodyPr wrap="square" lIns="109728" tIns="54864" rIns="109728" bIns="54864" anchor="t">
             <a:spAutoFit/>
           </a:bodyPr>
           <a:lstStyle/>
@@ -4995,6 +5021,7 @@
           <a:lstStyle/>
           <a:p>
             <a:pPr algn="ctr"/>
+            <a:endParaRPr/>
           </a:p>
         </p:txBody>
       </p:sp>
@@ -5035,7 +5062,7 @@
           </a:fontRef>
         </p:style>
         <p:txBody>
-          <a:bodyPr rtlCol="0" anchor="ctr" wrap="square" lIns="109728" rIns="109728" tIns="54864" bIns="54864"/>
+          <a:bodyPr wrap="square" lIns="109728" tIns="54864" rIns="109728" bIns="54864" rtlCol="0" anchor="ctr"/>
           <a:lstStyle/>
           <a:p>
             <a:pPr algn="ctr">
@@ -5075,7 +5102,7 @@
           <a:noFill/>
         </p:spPr>
         <p:txBody>
-          <a:bodyPr wrap="square" anchor="ctr" lIns="109728" rIns="109728" tIns="54864" bIns="54864">
+          <a:bodyPr wrap="square" lIns="109728" tIns="54864" rIns="109728" bIns="54864" anchor="ctr">
             <a:spAutoFit/>
           </a:bodyPr>
           <a:lstStyle/>
@@ -5162,6 +5189,7 @@
           <a:lstStyle/>
           <a:p>
             <a:pPr algn="ctr"/>
+            <a:endParaRPr/>
           </a:p>
         </p:txBody>
       </p:sp>
@@ -5202,7 +5230,7 @@
           </a:fontRef>
         </p:style>
         <p:txBody>
-          <a:bodyPr rtlCol="0" anchor="ctr" wrap="square" lIns="109728" rIns="109728" tIns="54864" bIns="54864"/>
+          <a:bodyPr wrap="square" lIns="109728" tIns="54864" rIns="109728" bIns="54864" rtlCol="0" anchor="ctr"/>
           <a:lstStyle/>
           <a:p>
             <a:pPr algn="ctr">
@@ -5242,7 +5270,7 @@
           <a:noFill/>
         </p:spPr>
         <p:txBody>
-          <a:bodyPr wrap="square" anchor="ctr" lIns="109728" rIns="109728" tIns="54864" bIns="54864">
+          <a:bodyPr wrap="square" lIns="109728" tIns="54864" rIns="109728" bIns="54864" anchor="ctr">
             <a:spAutoFit/>
           </a:bodyPr>
           <a:lstStyle/>
@@ -5329,6 +5357,7 @@
           <a:lstStyle/>
           <a:p>
             <a:pPr algn="ctr"/>
+            <a:endParaRPr/>
           </a:p>
         </p:txBody>
       </p:sp>
@@ -5369,7 +5398,7 @@
           </a:fontRef>
         </p:style>
         <p:txBody>
-          <a:bodyPr rtlCol="0" anchor="ctr" wrap="square" lIns="109728" rIns="109728" tIns="54864" bIns="54864"/>
+          <a:bodyPr wrap="square" lIns="109728" tIns="54864" rIns="109728" bIns="54864" rtlCol="0" anchor="ctr"/>
           <a:lstStyle/>
           <a:p>
             <a:pPr algn="ctr">
@@ -5409,7 +5438,7 @@
           <a:noFill/>
         </p:spPr>
         <p:txBody>
-          <a:bodyPr wrap="square" anchor="ctr" lIns="109728" rIns="109728" tIns="54864" bIns="54864">
+          <a:bodyPr wrap="square" lIns="109728" tIns="54864" rIns="109728" bIns="54864" anchor="ctr">
             <a:spAutoFit/>
           </a:bodyPr>
           <a:lstStyle/>
@@ -5496,6 +5525,7 @@
           <a:lstStyle/>
           <a:p>
             <a:pPr algn="ctr"/>
+            <a:endParaRPr/>
           </a:p>
         </p:txBody>
       </p:sp>
@@ -5536,7 +5566,7 @@
           </a:fontRef>
         </p:style>
         <p:txBody>
-          <a:bodyPr rtlCol="0" anchor="ctr" wrap="square" lIns="109728" rIns="109728" tIns="54864" bIns="54864"/>
+          <a:bodyPr wrap="square" lIns="109728" tIns="54864" rIns="109728" bIns="54864" rtlCol="0" anchor="ctr"/>
           <a:lstStyle/>
           <a:p>
             <a:pPr algn="ctr">
@@ -5576,7 +5606,7 @@
           <a:noFill/>
         </p:spPr>
         <p:txBody>
-          <a:bodyPr wrap="square" anchor="ctr" lIns="109728" rIns="109728" tIns="54864" bIns="54864">
+          <a:bodyPr wrap="square" lIns="109728" tIns="54864" rIns="109728" bIns="54864" anchor="ctr">
             <a:spAutoFit/>
           </a:bodyPr>
           <a:lstStyle/>
@@ -5629,7 +5659,7 @@
 </file>
 
 <file path=ppt/slides/slide12.xml><?xml version="1.0" encoding="utf-8"?>
-<p:sld xmlns:a="http://schemas.openxmlformats.org/drawingml/2006/main" xmlns:p="http://schemas.openxmlformats.org/presentationml/2006/main" xmlns:r="http://schemas.openxmlformats.org/officeDocument/2006/relationships">
+<p:sld xmlns:a="http://schemas.openxmlformats.org/drawingml/2006/main" xmlns:r="http://schemas.openxmlformats.org/officeDocument/2006/relationships" xmlns:p="http://schemas.openxmlformats.org/presentationml/2006/main">
   <p:cSld>
     <p:spTree>
       <p:nvGrpSpPr>
@@ -5637,7 +5667,14 @@
         <p:cNvGrpSpPr/>
         <p:nvPr/>
       </p:nvGrpSpPr>
-      <p:grpSpPr/>
+      <p:grpSpPr>
+        <a:xfrm>
+          <a:off x="0" y="0"/>
+          <a:ext cx="0" cy="0"/>
+          <a:chOff x="0" y="0"/>
+          <a:chExt cx="0" cy="0"/>
+        </a:xfrm>
+      </p:grpSpPr>
       <p:sp>
         <p:nvSpPr>
           <p:cNvPr id="2" name="Rectangle 1"/>
@@ -5679,6 +5716,7 @@
           <a:lstStyle/>
           <a:p>
             <a:pPr algn="ctr"/>
+            <a:endParaRPr/>
           </a:p>
         </p:txBody>
       </p:sp>
@@ -5723,6 +5761,7 @@
           <a:lstStyle/>
           <a:p>
             <a:pPr algn="ctr"/>
+            <a:endParaRPr/>
           </a:p>
         </p:txBody>
       </p:sp>
@@ -5743,7 +5782,7 @@
           <a:noFill/>
         </p:spPr>
         <p:txBody>
-          <a:bodyPr wrap="square" anchor="t" lIns="109728" rIns="109728" tIns="54864" bIns="54864">
+          <a:bodyPr wrap="square" lIns="109728" tIns="54864" rIns="109728" bIns="54864" anchor="t">
             <a:spAutoFit/>
           </a:bodyPr>
           <a:lstStyle/>
@@ -5785,7 +5824,7 @@
           <a:noFill/>
         </p:spPr>
         <p:txBody>
-          <a:bodyPr wrap="square" anchor="ctr" lIns="109728" rIns="109728" tIns="54864" bIns="54864">
+          <a:bodyPr wrap="square" lIns="109728" tIns="54864" rIns="109728" bIns="54864" anchor="ctr">
             <a:spAutoFit/>
           </a:bodyPr>
           <a:lstStyle/>
@@ -5851,6 +5890,7 @@
           <a:lstStyle/>
           <a:p>
             <a:pPr algn="ctr"/>
+            <a:endParaRPr/>
           </a:p>
         </p:txBody>
       </p:sp>
@@ -5871,7 +5911,7 @@
           <a:noFill/>
         </p:spPr>
         <p:txBody>
-          <a:bodyPr wrap="square" anchor="ctr" lIns="109728" rIns="109728" tIns="54864" bIns="54864">
+          <a:bodyPr wrap="square" lIns="109728" tIns="54864" rIns="109728" bIns="54864" anchor="ctr">
             <a:spAutoFit/>
           </a:bodyPr>
           <a:lstStyle/>
@@ -5913,7 +5953,7 @@
           <a:noFill/>
         </p:spPr>
         <p:txBody>
-          <a:bodyPr wrap="square" anchor="ctr" lIns="109728" rIns="109728" tIns="54864" bIns="54864">
+          <a:bodyPr wrap="square" lIns="109728" tIns="54864" rIns="109728" bIns="54864" anchor="ctr">
             <a:spAutoFit/>
           </a:bodyPr>
           <a:lstStyle/>
@@ -5983,6 +6023,7 @@
           <a:lstStyle/>
           <a:p>
             <a:pPr algn="ctr"/>
+            <a:endParaRPr/>
           </a:p>
         </p:txBody>
       </p:sp>
@@ -6023,7 +6064,7 @@
           </a:fontRef>
         </p:style>
         <p:txBody>
-          <a:bodyPr rtlCol="0" anchor="ctr" wrap="square" lIns="109728" rIns="109728" tIns="54864" bIns="54864"/>
+          <a:bodyPr wrap="square" lIns="109728" tIns="54864" rIns="109728" bIns="54864" rtlCol="0" anchor="ctr"/>
           <a:lstStyle/>
           <a:p>
             <a:pPr algn="ctr">
@@ -6063,7 +6104,7 @@
           <a:noFill/>
         </p:spPr>
         <p:txBody>
-          <a:bodyPr wrap="square" anchor="ctr" lIns="109728" rIns="109728" tIns="54864" bIns="54864">
+          <a:bodyPr wrap="square" lIns="109728" tIns="54864" rIns="109728" bIns="54864" anchor="ctr">
             <a:spAutoFit/>
           </a:bodyPr>
           <a:lstStyle/>
@@ -6133,6 +6174,7 @@
           <a:lstStyle/>
           <a:p>
             <a:pPr algn="ctr"/>
+            <a:endParaRPr/>
           </a:p>
         </p:txBody>
       </p:sp>
@@ -6173,7 +6215,7 @@
           </a:fontRef>
         </p:style>
         <p:txBody>
-          <a:bodyPr rtlCol="0" anchor="ctr" wrap="square" lIns="109728" rIns="109728" tIns="54864" bIns="54864"/>
+          <a:bodyPr wrap="square" lIns="109728" tIns="54864" rIns="109728" bIns="54864" rtlCol="0" anchor="ctr"/>
           <a:lstStyle/>
           <a:p>
             <a:pPr algn="ctr">
@@ -6213,7 +6255,7 @@
           <a:noFill/>
         </p:spPr>
         <p:txBody>
-          <a:bodyPr wrap="square" anchor="ctr" lIns="109728" rIns="109728" tIns="54864" bIns="54864">
+          <a:bodyPr wrap="square" lIns="109728" tIns="54864" rIns="109728" bIns="54864" anchor="ctr">
             <a:spAutoFit/>
           </a:bodyPr>
           <a:lstStyle/>
@@ -6283,6 +6325,7 @@
           <a:lstStyle/>
           <a:p>
             <a:pPr algn="ctr"/>
+            <a:endParaRPr/>
           </a:p>
         </p:txBody>
       </p:sp>
@@ -6323,7 +6366,7 @@
           </a:fontRef>
         </p:style>
         <p:txBody>
-          <a:bodyPr rtlCol="0" anchor="ctr" wrap="square" lIns="109728" rIns="109728" tIns="54864" bIns="54864"/>
+          <a:bodyPr wrap="square" lIns="109728" tIns="54864" rIns="109728" bIns="54864" rtlCol="0" anchor="ctr"/>
           <a:lstStyle/>
           <a:p>
             <a:pPr algn="ctr">
@@ -6363,7 +6406,7 @@
           <a:noFill/>
         </p:spPr>
         <p:txBody>
-          <a:bodyPr wrap="square" anchor="ctr" lIns="109728" rIns="109728" tIns="54864" bIns="54864">
+          <a:bodyPr wrap="square" lIns="109728" tIns="54864" rIns="109728" bIns="54864" anchor="ctr">
             <a:spAutoFit/>
           </a:bodyPr>
           <a:lstStyle/>
@@ -6433,6 +6476,7 @@
           <a:lstStyle/>
           <a:p>
             <a:pPr algn="ctr"/>
+            <a:endParaRPr/>
           </a:p>
         </p:txBody>
       </p:sp>
@@ -6473,7 +6517,7 @@
           </a:fontRef>
         </p:style>
         <p:txBody>
-          <a:bodyPr rtlCol="0" anchor="ctr" wrap="square" lIns="109728" rIns="109728" tIns="54864" bIns="54864"/>
+          <a:bodyPr wrap="square" lIns="109728" tIns="54864" rIns="109728" bIns="54864" rtlCol="0" anchor="ctr"/>
           <a:lstStyle/>
           <a:p>
             <a:pPr algn="ctr">
@@ -6513,7 +6557,7 @@
           <a:noFill/>
         </p:spPr>
         <p:txBody>
-          <a:bodyPr wrap="square" anchor="ctr" lIns="109728" rIns="109728" tIns="54864" bIns="54864">
+          <a:bodyPr wrap="square" lIns="109728" tIns="54864" rIns="109728" bIns="54864" anchor="ctr">
             <a:spAutoFit/>
           </a:bodyPr>
           <a:lstStyle/>
@@ -6583,6 +6627,7 @@
           <a:lstStyle/>
           <a:p>
             <a:pPr algn="ctr"/>
+            <a:endParaRPr/>
           </a:p>
         </p:txBody>
       </p:sp>
@@ -6623,7 +6668,7 @@
           </a:fontRef>
         </p:style>
         <p:txBody>
-          <a:bodyPr rtlCol="0" anchor="ctr" wrap="square" lIns="109728" rIns="109728" tIns="54864" bIns="54864"/>
+          <a:bodyPr wrap="square" lIns="109728" tIns="54864" rIns="109728" bIns="54864" rtlCol="0" anchor="ctr"/>
           <a:lstStyle/>
           <a:p>
             <a:pPr algn="ctr">
@@ -6663,7 +6708,7 @@
           <a:noFill/>
         </p:spPr>
         <p:txBody>
-          <a:bodyPr wrap="square" anchor="ctr" lIns="109728" rIns="109728" tIns="54864" bIns="54864">
+          <a:bodyPr wrap="square" lIns="109728" tIns="54864" rIns="109728" bIns="54864" anchor="ctr">
             <a:spAutoFit/>
           </a:bodyPr>
           <a:lstStyle/>
@@ -6697,7 +6742,7 @@
 </file>
 
 <file path=ppt/slides/slide13.xml><?xml version="1.0" encoding="utf-8"?>
-<p:sld xmlns:a="http://schemas.openxmlformats.org/drawingml/2006/main" xmlns:p="http://schemas.openxmlformats.org/presentationml/2006/main" xmlns:r="http://schemas.openxmlformats.org/officeDocument/2006/relationships">
+<p:sld xmlns:a="http://schemas.openxmlformats.org/drawingml/2006/main" xmlns:r="http://schemas.openxmlformats.org/officeDocument/2006/relationships" xmlns:p="http://schemas.openxmlformats.org/presentationml/2006/main">
   <p:cSld>
     <p:spTree>
       <p:nvGrpSpPr>
@@ -6705,7 +6750,14 @@
         <p:cNvGrpSpPr/>
         <p:nvPr/>
       </p:nvGrpSpPr>
-      <p:grpSpPr/>
+      <p:grpSpPr>
+        <a:xfrm>
+          <a:off x="0" y="0"/>
+          <a:ext cx="0" cy="0"/>
+          <a:chOff x="0" y="0"/>
+          <a:chExt cx="0" cy="0"/>
+        </a:xfrm>
+      </p:grpSpPr>
       <p:sp>
         <p:nvSpPr>
           <p:cNvPr id="2" name="Rectangle 1"/>
@@ -6747,6 +6799,7 @@
           <a:lstStyle/>
           <a:p>
             <a:pPr algn="ctr"/>
+            <a:endParaRPr/>
           </a:p>
         </p:txBody>
       </p:sp>
@@ -6791,6 +6844,7 @@
           <a:lstStyle/>
           <a:p>
             <a:pPr algn="ctr"/>
+            <a:endParaRPr/>
           </a:p>
         </p:txBody>
       </p:sp>
@@ -6835,6 +6889,7 @@
           <a:lstStyle/>
           <a:p>
             <a:pPr algn="ctr"/>
+            <a:endParaRPr/>
           </a:p>
         </p:txBody>
       </p:sp>
@@ -6855,7 +6910,7 @@
           <a:noFill/>
         </p:spPr>
         <p:txBody>
-          <a:bodyPr wrap="square" anchor="t" lIns="109728" rIns="109728" tIns="54864" bIns="54864">
+          <a:bodyPr wrap="square" lIns="109728" tIns="54864" rIns="109728" bIns="54864" anchor="t">
             <a:spAutoFit/>
           </a:bodyPr>
           <a:lstStyle/>
@@ -6897,7 +6952,7 @@
           <a:noFill/>
         </p:spPr>
         <p:txBody>
-          <a:bodyPr wrap="square" anchor="t" lIns="109728" rIns="109728" tIns="54864" bIns="54864">
+          <a:bodyPr wrap="square" lIns="109728" tIns="54864" rIns="109728" bIns="54864" anchor="t">
             <a:spAutoFit/>
           </a:bodyPr>
           <a:lstStyle/>
@@ -6961,7 +7016,7 @@
           </a:fontRef>
         </p:style>
         <p:txBody>
-          <a:bodyPr rtlCol="0" anchor="ctr" wrap="square" lIns="109728" rIns="109728" tIns="54864" bIns="54864"/>
+          <a:bodyPr wrap="square" lIns="109728" tIns="54864" rIns="109728" bIns="54864" rtlCol="0" anchor="ctr"/>
           <a:lstStyle/>
           <a:p>
             <a:pPr algn="ctr">
@@ -6993,7 +7048,7 @@
 </file>
 
 <file path=ppt/slides/slide2.xml><?xml version="1.0" encoding="utf-8"?>
-<p:sld xmlns:a="http://schemas.openxmlformats.org/drawingml/2006/main" xmlns:p="http://schemas.openxmlformats.org/presentationml/2006/main" xmlns:r="http://schemas.openxmlformats.org/officeDocument/2006/relationships">
+<p:sld xmlns:a="http://schemas.openxmlformats.org/drawingml/2006/main" xmlns:r="http://schemas.openxmlformats.org/officeDocument/2006/relationships" xmlns:p="http://schemas.openxmlformats.org/presentationml/2006/main">
   <p:cSld>
     <p:spTree>
       <p:nvGrpSpPr>
@@ -7001,7 +7056,14 @@
         <p:cNvGrpSpPr/>
         <p:nvPr/>
       </p:nvGrpSpPr>
-      <p:grpSpPr/>
+      <p:grpSpPr>
+        <a:xfrm>
+          <a:off x="0" y="0"/>
+          <a:ext cx="0" cy="0"/>
+          <a:chOff x="0" y="0"/>
+          <a:chExt cx="0" cy="0"/>
+        </a:xfrm>
+      </p:grpSpPr>
       <p:sp>
         <p:nvSpPr>
           <p:cNvPr id="2" name="Rectangle 1"/>
@@ -7043,6 +7105,7 @@
           <a:lstStyle/>
           <a:p>
             <a:pPr algn="ctr"/>
+            <a:endParaRPr/>
           </a:p>
         </p:txBody>
       </p:sp>
@@ -7087,6 +7150,7 @@
           <a:lstStyle/>
           <a:p>
             <a:pPr algn="ctr"/>
+            <a:endParaRPr/>
           </a:p>
         </p:txBody>
       </p:sp>
@@ -7107,7 +7171,7 @@
           <a:noFill/>
         </p:spPr>
         <p:txBody>
-          <a:bodyPr wrap="square" anchor="t" lIns="109728" rIns="109728" tIns="54864" bIns="54864">
+          <a:bodyPr wrap="square" lIns="109728" tIns="54864" rIns="109728" bIns="54864" anchor="t">
             <a:spAutoFit/>
           </a:bodyPr>
           <a:lstStyle/>
@@ -7149,7 +7213,7 @@
           <a:noFill/>
         </p:spPr>
         <p:txBody>
-          <a:bodyPr wrap="square" anchor="ctr" lIns="109728" rIns="109728" tIns="54864" bIns="54864">
+          <a:bodyPr wrap="square" lIns="109728" tIns="54864" rIns="109728" bIns="54864" anchor="ctr">
             <a:spAutoFit/>
           </a:bodyPr>
           <a:lstStyle/>
@@ -7215,6 +7279,7 @@
           <a:lstStyle/>
           <a:p>
             <a:pPr algn="ctr"/>
+            <a:endParaRPr/>
           </a:p>
         </p:txBody>
       </p:sp>
@@ -7235,7 +7300,7 @@
           <a:noFill/>
         </p:spPr>
         <p:txBody>
-          <a:bodyPr wrap="square" anchor="ctr" lIns="109728" rIns="109728" tIns="54864" bIns="54864">
+          <a:bodyPr wrap="square" lIns="109728" tIns="54864" rIns="109728" bIns="54864" anchor="ctr">
             <a:spAutoFit/>
           </a:bodyPr>
           <a:lstStyle/>
@@ -7277,7 +7342,7 @@
           <a:noFill/>
         </p:spPr>
         <p:txBody>
-          <a:bodyPr wrap="square" anchor="ctr" lIns="109728" rIns="109728" tIns="54864" bIns="54864">
+          <a:bodyPr wrap="square" lIns="109728" tIns="54864" rIns="109728" bIns="54864" anchor="ctr">
             <a:spAutoFit/>
           </a:bodyPr>
           <a:lstStyle/>
@@ -7325,13 +7390,6 @@
             <a:noFill/>
           </a:ln>
           <a:effectLst/>
-          <a:effectLst>
-            <a:outerShdw blurRad="60000" dist="25000" dir="5400000" rotWithShape="0">
-              <a:srgbClr val="1A1A2E">
-                <a:alpha val="22000"/>
-              </a:srgbClr>
-            </a:outerShdw>
-          </a:effectLst>
         </p:spPr>
         <p:style>
           <a:lnRef idx="1">
@@ -7352,6 +7410,7 @@
           <a:lstStyle/>
           <a:p>
             <a:pPr algn="ctr"/>
+            <a:endParaRPr/>
           </a:p>
         </p:txBody>
       </p:sp>
@@ -7372,7 +7431,7 @@
           <a:noFill/>
         </p:spPr>
         <p:txBody>
-          <a:bodyPr wrap="square" anchor="ctr" lIns="109728" rIns="109728" tIns="54864" bIns="54864">
+          <a:bodyPr wrap="square" lIns="109728" tIns="54864" rIns="109728" bIns="54864" anchor="ctr">
             <a:spAutoFit/>
           </a:bodyPr>
           <a:lstStyle/>
@@ -7414,7 +7473,7 @@
           <a:noFill/>
         </p:spPr>
         <p:txBody>
-          <a:bodyPr wrap="square" anchor="ctr" lIns="109728" rIns="109728" tIns="54864" bIns="54864">
+          <a:bodyPr wrap="square" lIns="109728" tIns="54864" rIns="109728" bIns="54864" anchor="ctr">
             <a:spAutoFit/>
           </a:bodyPr>
           <a:lstStyle/>
@@ -7462,13 +7521,6 @@
             <a:noFill/>
           </a:ln>
           <a:effectLst/>
-          <a:effectLst>
-            <a:outerShdw blurRad="60000" dist="25000" dir="5400000" rotWithShape="0">
-              <a:srgbClr val="1A1A2E">
-                <a:alpha val="22000"/>
-              </a:srgbClr>
-            </a:outerShdw>
-          </a:effectLst>
         </p:spPr>
         <p:style>
           <a:lnRef idx="1">
@@ -7489,6 +7541,7 @@
           <a:lstStyle/>
           <a:p>
             <a:pPr algn="ctr"/>
+            <a:endParaRPr/>
           </a:p>
         </p:txBody>
       </p:sp>
@@ -7509,7 +7562,7 @@
           <a:noFill/>
         </p:spPr>
         <p:txBody>
-          <a:bodyPr wrap="square" anchor="ctr" lIns="109728" rIns="109728" tIns="54864" bIns="54864">
+          <a:bodyPr wrap="square" lIns="109728" tIns="54864" rIns="109728" bIns="54864" anchor="ctr">
             <a:spAutoFit/>
           </a:bodyPr>
           <a:lstStyle/>
@@ -7551,7 +7604,7 @@
           <a:noFill/>
         </p:spPr>
         <p:txBody>
-          <a:bodyPr wrap="square" anchor="ctr" lIns="109728" rIns="109728" tIns="54864" bIns="54864">
+          <a:bodyPr wrap="square" lIns="109728" tIns="54864" rIns="109728" bIns="54864" anchor="ctr">
             <a:spAutoFit/>
           </a:bodyPr>
           <a:lstStyle/>
@@ -7599,13 +7652,6 @@
             <a:noFill/>
           </a:ln>
           <a:effectLst/>
-          <a:effectLst>
-            <a:outerShdw blurRad="60000" dist="25000" dir="5400000" rotWithShape="0">
-              <a:srgbClr val="1A1A2E">
-                <a:alpha val="22000"/>
-              </a:srgbClr>
-            </a:outerShdw>
-          </a:effectLst>
         </p:spPr>
         <p:style>
           <a:lnRef idx="1">
@@ -7626,6 +7672,7 @@
           <a:lstStyle/>
           <a:p>
             <a:pPr algn="ctr"/>
+            <a:endParaRPr/>
           </a:p>
         </p:txBody>
       </p:sp>
@@ -7646,7 +7693,7 @@
           <a:noFill/>
         </p:spPr>
         <p:txBody>
-          <a:bodyPr wrap="square" anchor="ctr" lIns="109728" rIns="109728" tIns="54864" bIns="54864">
+          <a:bodyPr wrap="square" lIns="109728" tIns="54864" rIns="109728" bIns="54864" anchor="ctr">
             <a:spAutoFit/>
           </a:bodyPr>
           <a:lstStyle/>
@@ -7688,7 +7735,7 @@
           <a:noFill/>
         </p:spPr>
         <p:txBody>
-          <a:bodyPr wrap="square" anchor="ctr" lIns="109728" rIns="109728" tIns="54864" bIns="54864">
+          <a:bodyPr wrap="square" lIns="109728" tIns="54864" rIns="109728" bIns="54864" anchor="ctr">
             <a:spAutoFit/>
           </a:bodyPr>
           <a:lstStyle/>
@@ -7730,7 +7777,7 @@
           <a:noFill/>
         </p:spPr>
         <p:txBody>
-          <a:bodyPr wrap="square" anchor="t" lIns="109728" rIns="109728" tIns="54864" bIns="54864">
+          <a:bodyPr wrap="square" lIns="109728" tIns="54864" rIns="109728" bIns="54864" anchor="t">
             <a:spAutoFit/>
           </a:bodyPr>
           <a:lstStyle/>
@@ -7798,6 +7845,7 @@
           <a:lstStyle/>
           <a:p>
             <a:pPr algn="ctr"/>
+            <a:endParaRPr/>
           </a:p>
         </p:txBody>
       </p:sp>
@@ -7840,7 +7888,7 @@
           </a:fontRef>
         </p:style>
         <p:txBody>
-          <a:bodyPr rtlCol="0" anchor="ctr" wrap="square" lIns="109728" rIns="109728" tIns="54864" bIns="54864"/>
+          <a:bodyPr wrap="square" lIns="109728" tIns="54864" rIns="109728" bIns="54864" rtlCol="0" anchor="ctr"/>
           <a:lstStyle/>
           <a:p>
             <a:pPr algn="ctr">
@@ -7880,7 +7928,7 @@
           <a:noFill/>
         </p:spPr>
         <p:txBody>
-          <a:bodyPr wrap="square" anchor="ctr" lIns="109728" rIns="109728" tIns="54864" bIns="54864">
+          <a:bodyPr wrap="square" lIns="109728" tIns="54864" rIns="109728" bIns="54864" anchor="ctr">
             <a:spAutoFit/>
           </a:bodyPr>
           <a:lstStyle/>
@@ -7948,6 +7996,7 @@
           <a:lstStyle/>
           <a:p>
             <a:pPr algn="ctr"/>
+            <a:endParaRPr/>
           </a:p>
         </p:txBody>
       </p:sp>
@@ -7990,7 +8039,7 @@
           </a:fontRef>
         </p:style>
         <p:txBody>
-          <a:bodyPr rtlCol="0" anchor="ctr" wrap="square" lIns="109728" rIns="109728" tIns="54864" bIns="54864"/>
+          <a:bodyPr wrap="square" lIns="109728" tIns="54864" rIns="109728" bIns="54864" rtlCol="0" anchor="ctr"/>
           <a:lstStyle/>
           <a:p>
             <a:pPr algn="ctr">
@@ -8030,7 +8079,7 @@
           <a:noFill/>
         </p:spPr>
         <p:txBody>
-          <a:bodyPr wrap="square" anchor="ctr" lIns="109728" rIns="109728" tIns="54864" bIns="54864">
+          <a:bodyPr wrap="square" lIns="109728" tIns="54864" rIns="109728" bIns="54864" anchor="ctr">
             <a:spAutoFit/>
           </a:bodyPr>
           <a:lstStyle/>
@@ -8098,6 +8147,7 @@
           <a:lstStyle/>
           <a:p>
             <a:pPr algn="ctr"/>
+            <a:endParaRPr/>
           </a:p>
         </p:txBody>
       </p:sp>
@@ -8140,7 +8190,7 @@
           </a:fontRef>
         </p:style>
         <p:txBody>
-          <a:bodyPr rtlCol="0" anchor="ctr" wrap="square" lIns="109728" rIns="109728" tIns="54864" bIns="54864"/>
+          <a:bodyPr wrap="square" lIns="109728" tIns="54864" rIns="109728" bIns="54864" rtlCol="0" anchor="ctr"/>
           <a:lstStyle/>
           <a:p>
             <a:pPr algn="ctr">
@@ -8180,7 +8230,7 @@
           <a:noFill/>
         </p:spPr>
         <p:txBody>
-          <a:bodyPr wrap="square" anchor="ctr" lIns="109728" rIns="109728" tIns="54864" bIns="54864">
+          <a:bodyPr wrap="square" lIns="109728" tIns="54864" rIns="109728" bIns="54864" anchor="ctr">
             <a:spAutoFit/>
           </a:bodyPr>
           <a:lstStyle/>
@@ -8248,6 +8298,7 @@
           <a:lstStyle/>
           <a:p>
             <a:pPr algn="ctr"/>
+            <a:endParaRPr/>
           </a:p>
         </p:txBody>
       </p:sp>
@@ -8290,7 +8341,7 @@
           </a:fontRef>
         </p:style>
         <p:txBody>
-          <a:bodyPr rtlCol="0" anchor="ctr" wrap="square" lIns="109728" rIns="109728" tIns="54864" bIns="54864"/>
+          <a:bodyPr wrap="square" lIns="109728" tIns="54864" rIns="109728" bIns="54864" rtlCol="0" anchor="ctr"/>
           <a:lstStyle/>
           <a:p>
             <a:pPr algn="ctr">
@@ -8330,7 +8381,7 @@
           <a:noFill/>
         </p:spPr>
         <p:txBody>
-          <a:bodyPr wrap="square" anchor="ctr" lIns="109728" rIns="109728" tIns="54864" bIns="54864">
+          <a:bodyPr wrap="square" lIns="109728" tIns="54864" rIns="109728" bIns="54864" anchor="ctr">
             <a:spAutoFit/>
           </a:bodyPr>
           <a:lstStyle/>
@@ -8398,6 +8449,7 @@
           <a:lstStyle/>
           <a:p>
             <a:pPr algn="ctr"/>
+            <a:endParaRPr/>
           </a:p>
         </p:txBody>
       </p:sp>
@@ -8440,7 +8492,7 @@
           </a:fontRef>
         </p:style>
         <p:txBody>
-          <a:bodyPr rtlCol="0" anchor="ctr" wrap="square" lIns="109728" rIns="109728" tIns="54864" bIns="54864"/>
+          <a:bodyPr wrap="square" lIns="109728" tIns="54864" rIns="109728" bIns="54864" rtlCol="0" anchor="ctr"/>
           <a:lstStyle/>
           <a:p>
             <a:pPr algn="ctr">
@@ -8480,7 +8532,7 @@
           <a:noFill/>
         </p:spPr>
         <p:txBody>
-          <a:bodyPr wrap="square" anchor="ctr" lIns="109728" rIns="109728" tIns="54864" bIns="54864">
+          <a:bodyPr wrap="square" lIns="109728" tIns="54864" rIns="109728" bIns="54864" anchor="ctr">
             <a:spAutoFit/>
           </a:bodyPr>
           <a:lstStyle/>
@@ -8514,7 +8566,7 @@
 </file>
 
 <file path=ppt/slides/slide3.xml><?xml version="1.0" encoding="utf-8"?>
-<p:sld xmlns:a="http://schemas.openxmlformats.org/drawingml/2006/main" xmlns:p="http://schemas.openxmlformats.org/presentationml/2006/main" xmlns:r="http://schemas.openxmlformats.org/officeDocument/2006/relationships">
+<p:sld xmlns:a="http://schemas.openxmlformats.org/drawingml/2006/main" xmlns:r="http://schemas.openxmlformats.org/officeDocument/2006/relationships" xmlns:p="http://schemas.openxmlformats.org/presentationml/2006/main">
   <p:cSld>
     <p:spTree>
       <p:nvGrpSpPr>
@@ -8522,7 +8574,14 @@
         <p:cNvGrpSpPr/>
         <p:nvPr/>
       </p:nvGrpSpPr>
-      <p:grpSpPr/>
+      <p:grpSpPr>
+        <a:xfrm>
+          <a:off x="0" y="0"/>
+          <a:ext cx="0" cy="0"/>
+          <a:chOff x="0" y="0"/>
+          <a:chExt cx="0" cy="0"/>
+        </a:xfrm>
+      </p:grpSpPr>
       <p:sp>
         <p:nvSpPr>
           <p:cNvPr id="2" name="Rectangle 1"/>
@@ -8564,6 +8623,7 @@
           <a:lstStyle/>
           <a:p>
             <a:pPr algn="ctr"/>
+            <a:endParaRPr/>
           </a:p>
         </p:txBody>
       </p:sp>
@@ -8608,6 +8668,7 @@
           <a:lstStyle/>
           <a:p>
             <a:pPr algn="ctr"/>
+            <a:endParaRPr/>
           </a:p>
         </p:txBody>
       </p:sp>
@@ -8628,7 +8689,7 @@
           <a:noFill/>
         </p:spPr>
         <p:txBody>
-          <a:bodyPr wrap="square" anchor="t" lIns="109728" rIns="109728" tIns="54864" bIns="54864">
+          <a:bodyPr wrap="square" lIns="109728" tIns="54864" rIns="109728" bIns="54864" anchor="t">
             <a:spAutoFit/>
           </a:bodyPr>
           <a:lstStyle/>
@@ -8670,7 +8731,7 @@
           <a:noFill/>
         </p:spPr>
         <p:txBody>
-          <a:bodyPr wrap="square" anchor="ctr" lIns="109728" rIns="109728" tIns="54864" bIns="54864">
+          <a:bodyPr wrap="square" lIns="109728" tIns="54864" rIns="109728" bIns="54864" anchor="ctr">
             <a:spAutoFit/>
           </a:bodyPr>
           <a:lstStyle/>
@@ -8736,6 +8797,7 @@
           <a:lstStyle/>
           <a:p>
             <a:pPr algn="ctr"/>
+            <a:endParaRPr/>
           </a:p>
         </p:txBody>
       </p:sp>
@@ -8756,7 +8818,7 @@
           <a:noFill/>
         </p:spPr>
         <p:txBody>
-          <a:bodyPr wrap="square" anchor="ctr" lIns="109728" rIns="109728" tIns="54864" bIns="54864">
+          <a:bodyPr wrap="square" lIns="109728" tIns="54864" rIns="109728" bIns="54864" anchor="ctr">
             <a:spAutoFit/>
           </a:bodyPr>
           <a:lstStyle/>
@@ -8798,7 +8860,7 @@
           <a:noFill/>
         </p:spPr>
         <p:txBody>
-          <a:bodyPr wrap="square" anchor="ctr" lIns="109728" rIns="109728" tIns="54864" bIns="54864">
+          <a:bodyPr wrap="square" lIns="109728" tIns="54864" rIns="109728" bIns="54864" anchor="ctr">
             <a:spAutoFit/>
           </a:bodyPr>
           <a:lstStyle/>
@@ -8868,6 +8930,7 @@
           <a:lstStyle/>
           <a:p>
             <a:pPr algn="ctr"/>
+            <a:endParaRPr/>
           </a:p>
         </p:txBody>
       </p:sp>
@@ -8888,7 +8951,7 @@
           <a:noFill/>
         </p:spPr>
         <p:txBody>
-          <a:bodyPr wrap="square" anchor="ctr" lIns="109728" rIns="109728" tIns="54864" bIns="54864">
+          <a:bodyPr wrap="square" lIns="109728" tIns="54864" rIns="109728" bIns="54864" anchor="ctr">
             <a:spAutoFit/>
           </a:bodyPr>
           <a:lstStyle/>
@@ -8930,7 +8993,7 @@
           <a:noFill/>
         </p:spPr>
         <p:txBody>
-          <a:bodyPr wrap="square" anchor="ctr" lIns="109728" rIns="109728" tIns="54864" bIns="54864">
+          <a:bodyPr wrap="square" lIns="109728" tIns="54864" rIns="109728" bIns="54864" anchor="ctr">
             <a:spAutoFit/>
           </a:bodyPr>
           <a:lstStyle/>
@@ -8980,13 +9043,6 @@
             </a:solidFill>
           </a:ln>
           <a:effectLst/>
-          <a:effectLst>
-            <a:outerShdw blurRad="60000" dist="25000" dir="5400000" rotWithShape="0">
-              <a:srgbClr val="1A1A2E">
-                <a:alpha val="22000"/>
-              </a:srgbClr>
-            </a:outerShdw>
-          </a:effectLst>
         </p:spPr>
         <p:style>
           <a:lnRef idx="1">
@@ -9007,6 +9063,7 @@
           <a:lstStyle/>
           <a:p>
             <a:pPr algn="ctr"/>
+            <a:endParaRPr/>
           </a:p>
         </p:txBody>
       </p:sp>
@@ -9027,7 +9084,7 @@
           <a:noFill/>
         </p:spPr>
         <p:txBody>
-          <a:bodyPr wrap="square" anchor="ctr" lIns="109728" rIns="109728" tIns="54864" bIns="54864">
+          <a:bodyPr wrap="square" lIns="109728" tIns="54864" rIns="109728" bIns="54864" anchor="ctr">
             <a:spAutoFit/>
           </a:bodyPr>
           <a:lstStyle/>
@@ -9069,7 +9126,7 @@
           <a:noFill/>
         </p:spPr>
         <p:txBody>
-          <a:bodyPr wrap="square" anchor="ctr" lIns="109728" rIns="109728" tIns="54864" bIns="54864">
+          <a:bodyPr wrap="square" lIns="109728" tIns="54864" rIns="109728" bIns="54864" anchor="ctr">
             <a:spAutoFit/>
           </a:bodyPr>
           <a:lstStyle/>
@@ -9139,6 +9196,7 @@
           <a:lstStyle/>
           <a:p>
             <a:pPr algn="ctr"/>
+            <a:endParaRPr/>
           </a:p>
         </p:txBody>
       </p:sp>
@@ -9159,7 +9217,7 @@
           <a:noFill/>
         </p:spPr>
         <p:txBody>
-          <a:bodyPr wrap="square" anchor="ctr" lIns="109728" rIns="109728" tIns="54864" bIns="54864">
+          <a:bodyPr wrap="square" lIns="109728" tIns="54864" rIns="109728" bIns="54864" anchor="ctr">
             <a:spAutoFit/>
           </a:bodyPr>
           <a:lstStyle/>
@@ -9201,7 +9259,7 @@
           <a:noFill/>
         </p:spPr>
         <p:txBody>
-          <a:bodyPr wrap="square" anchor="ctr" lIns="109728" rIns="109728" tIns="54864" bIns="54864">
+          <a:bodyPr wrap="square" lIns="109728" tIns="54864" rIns="109728" bIns="54864" anchor="ctr">
             <a:spAutoFit/>
           </a:bodyPr>
           <a:lstStyle/>
@@ -9271,6 +9329,7 @@
           <a:lstStyle/>
           <a:p>
             <a:pPr algn="ctr"/>
+            <a:endParaRPr/>
           </a:p>
         </p:txBody>
       </p:sp>
@@ -9291,7 +9350,7 @@
           <a:noFill/>
         </p:spPr>
         <p:txBody>
-          <a:bodyPr wrap="square" anchor="ctr" lIns="109728" rIns="109728" tIns="54864" bIns="54864">
+          <a:bodyPr wrap="square" lIns="109728" tIns="54864" rIns="109728" bIns="54864" anchor="ctr">
             <a:spAutoFit/>
           </a:bodyPr>
           <a:lstStyle/>
@@ -9333,7 +9392,7 @@
           <a:noFill/>
         </p:spPr>
         <p:txBody>
-          <a:bodyPr wrap="square" anchor="ctr" lIns="109728" rIns="109728" tIns="54864" bIns="54864">
+          <a:bodyPr wrap="square" lIns="109728" tIns="54864" rIns="109728" bIns="54864" anchor="ctr">
             <a:spAutoFit/>
           </a:bodyPr>
           <a:lstStyle/>
@@ -9403,6 +9462,7 @@
           <a:lstStyle/>
           <a:p>
             <a:pPr algn="ctr"/>
+            <a:endParaRPr/>
           </a:p>
         </p:txBody>
       </p:sp>
@@ -9423,7 +9483,7 @@
           <a:noFill/>
         </p:spPr>
         <p:txBody>
-          <a:bodyPr wrap="square" anchor="ctr" lIns="109728" rIns="109728" tIns="54864" bIns="54864">
+          <a:bodyPr wrap="square" lIns="109728" tIns="54864" rIns="109728" bIns="54864" anchor="ctr">
             <a:spAutoFit/>
           </a:bodyPr>
           <a:lstStyle/>
@@ -9465,7 +9525,7 @@
           <a:noFill/>
         </p:spPr>
         <p:txBody>
-          <a:bodyPr wrap="square" anchor="ctr" lIns="109728" rIns="109728" tIns="54864" bIns="54864">
+          <a:bodyPr wrap="square" lIns="109728" tIns="54864" rIns="109728" bIns="54864" anchor="ctr">
             <a:spAutoFit/>
           </a:bodyPr>
           <a:lstStyle/>
@@ -9507,7 +9567,7 @@
           <a:noFill/>
         </p:spPr>
         <p:txBody>
-          <a:bodyPr wrap="square" anchor="t" lIns="109728" rIns="109728" tIns="54864" bIns="54864">
+          <a:bodyPr wrap="square" lIns="109728" tIns="54864" rIns="109728" bIns="54864" anchor="t">
             <a:spAutoFit/>
           </a:bodyPr>
           <a:lstStyle/>
@@ -9541,7 +9601,7 @@
 </file>
 
 <file path=ppt/slides/slide4.xml><?xml version="1.0" encoding="utf-8"?>
-<p:sld xmlns:a="http://schemas.openxmlformats.org/drawingml/2006/main" xmlns:p="http://schemas.openxmlformats.org/presentationml/2006/main" xmlns:r="http://schemas.openxmlformats.org/officeDocument/2006/relationships">
+<p:sld xmlns:a="http://schemas.openxmlformats.org/drawingml/2006/main" xmlns:r="http://schemas.openxmlformats.org/officeDocument/2006/relationships" xmlns:p="http://schemas.openxmlformats.org/presentationml/2006/main">
   <p:cSld>
     <p:spTree>
       <p:nvGrpSpPr>
@@ -9549,7 +9609,14 @@
         <p:cNvGrpSpPr/>
         <p:nvPr/>
       </p:nvGrpSpPr>
-      <p:grpSpPr/>
+      <p:grpSpPr>
+        <a:xfrm>
+          <a:off x="0" y="0"/>
+          <a:ext cx="0" cy="0"/>
+          <a:chOff x="0" y="0"/>
+          <a:chExt cx="0" cy="0"/>
+        </a:xfrm>
+      </p:grpSpPr>
       <p:sp>
         <p:nvSpPr>
           <p:cNvPr id="2" name="Rectangle 1"/>
@@ -9591,6 +9658,7 @@
           <a:lstStyle/>
           <a:p>
             <a:pPr algn="ctr"/>
+            <a:endParaRPr/>
           </a:p>
         </p:txBody>
       </p:sp>
@@ -9635,6 +9703,7 @@
           <a:lstStyle/>
           <a:p>
             <a:pPr algn="ctr"/>
+            <a:endParaRPr/>
           </a:p>
         </p:txBody>
       </p:sp>
@@ -9655,7 +9724,7 @@
           <a:noFill/>
         </p:spPr>
         <p:txBody>
-          <a:bodyPr wrap="square" anchor="t" lIns="109728" rIns="109728" tIns="54864" bIns="54864">
+          <a:bodyPr wrap="square" lIns="109728" tIns="54864" rIns="109728" bIns="54864" anchor="t">
             <a:spAutoFit/>
           </a:bodyPr>
           <a:lstStyle/>
@@ -9697,7 +9766,7 @@
           <a:noFill/>
         </p:spPr>
         <p:txBody>
-          <a:bodyPr wrap="square" anchor="ctr" lIns="109728" rIns="109728" tIns="54864" bIns="54864">
+          <a:bodyPr wrap="square" lIns="109728" tIns="54864" rIns="109728" bIns="54864" anchor="ctr">
             <a:spAutoFit/>
           </a:bodyPr>
           <a:lstStyle/>
@@ -9763,6 +9832,7 @@
           <a:lstStyle/>
           <a:p>
             <a:pPr algn="ctr"/>
+            <a:endParaRPr/>
           </a:p>
         </p:txBody>
       </p:sp>
@@ -9783,7 +9853,7 @@
           <a:noFill/>
         </p:spPr>
         <p:txBody>
-          <a:bodyPr wrap="square" anchor="ctr" lIns="109728" rIns="109728" tIns="54864" bIns="54864">
+          <a:bodyPr wrap="square" lIns="109728" tIns="54864" rIns="109728" bIns="54864" anchor="ctr">
             <a:spAutoFit/>
           </a:bodyPr>
           <a:lstStyle/>
@@ -9825,7 +9895,7 @@
           <a:noFill/>
         </p:spPr>
         <p:txBody>
-          <a:bodyPr wrap="square" anchor="ctr" lIns="109728" rIns="109728" tIns="54864" bIns="54864">
+          <a:bodyPr wrap="square" lIns="109728" tIns="54864" rIns="109728" bIns="54864" anchor="ctr">
             <a:spAutoFit/>
           </a:bodyPr>
           <a:lstStyle/>
@@ -9875,13 +9945,6 @@
             </a:solidFill>
           </a:ln>
           <a:effectLst/>
-          <a:effectLst>
-            <a:outerShdw blurRad="60000" dist="25000" dir="5400000" rotWithShape="0">
-              <a:srgbClr val="1A1A2E">
-                <a:alpha val="22000"/>
-              </a:srgbClr>
-            </a:outerShdw>
-          </a:effectLst>
         </p:spPr>
         <p:style>
           <a:lnRef idx="1">
@@ -9902,6 +9965,7 @@
           <a:lstStyle/>
           <a:p>
             <a:pPr algn="ctr"/>
+            <a:endParaRPr/>
           </a:p>
         </p:txBody>
       </p:sp>
@@ -9946,6 +10010,7 @@
           <a:lstStyle/>
           <a:p>
             <a:pPr algn="ctr"/>
+            <a:endParaRPr/>
           </a:p>
         </p:txBody>
       </p:sp>
@@ -9966,7 +10031,7 @@
           <a:noFill/>
         </p:spPr>
         <p:txBody>
-          <a:bodyPr wrap="square" anchor="t" lIns="109728" rIns="109728" tIns="54864" bIns="54864">
+          <a:bodyPr wrap="square" lIns="109728" tIns="54864" rIns="109728" bIns="54864" anchor="t">
             <a:spAutoFit/>
           </a:bodyPr>
           <a:lstStyle/>
@@ -10035,13 +10100,6 @@
             </a:solidFill>
           </a:ln>
           <a:effectLst/>
-          <a:effectLst>
-            <a:outerShdw blurRad="60000" dist="25000" dir="5400000" rotWithShape="0">
-              <a:srgbClr val="1A1A2E">
-                <a:alpha val="22000"/>
-              </a:srgbClr>
-            </a:outerShdw>
-          </a:effectLst>
         </p:spPr>
         <p:style>
           <a:lnRef idx="1">
@@ -10062,6 +10120,7 @@
           <a:lstStyle/>
           <a:p>
             <a:pPr algn="ctr"/>
+            <a:endParaRPr/>
           </a:p>
         </p:txBody>
       </p:sp>
@@ -10106,6 +10165,7 @@
           <a:lstStyle/>
           <a:p>
             <a:pPr algn="ctr"/>
+            <a:endParaRPr/>
           </a:p>
         </p:txBody>
       </p:sp>
@@ -10126,7 +10186,7 @@
           <a:noFill/>
         </p:spPr>
         <p:txBody>
-          <a:bodyPr wrap="square" anchor="t" lIns="109728" rIns="109728" tIns="54864" bIns="54864">
+          <a:bodyPr wrap="square" lIns="109728" tIns="54864" rIns="109728" bIns="54864" anchor="t">
             <a:spAutoFit/>
           </a:bodyPr>
           <a:lstStyle/>
@@ -10195,13 +10255,6 @@
             </a:solidFill>
           </a:ln>
           <a:effectLst/>
-          <a:effectLst>
-            <a:outerShdw blurRad="60000" dist="25000" dir="5400000" rotWithShape="0">
-              <a:srgbClr val="1A1A2E">
-                <a:alpha val="22000"/>
-              </a:srgbClr>
-            </a:outerShdw>
-          </a:effectLst>
         </p:spPr>
         <p:style>
           <a:lnRef idx="1">
@@ -10222,6 +10275,7 @@
           <a:lstStyle/>
           <a:p>
             <a:pPr algn="ctr"/>
+            <a:endParaRPr/>
           </a:p>
         </p:txBody>
       </p:sp>
@@ -10266,6 +10320,7 @@
           <a:lstStyle/>
           <a:p>
             <a:pPr algn="ctr"/>
+            <a:endParaRPr/>
           </a:p>
         </p:txBody>
       </p:sp>
@@ -10286,7 +10341,7 @@
           <a:noFill/>
         </p:spPr>
         <p:txBody>
-          <a:bodyPr wrap="square" anchor="t" lIns="109728" rIns="109728" tIns="54864" bIns="54864">
+          <a:bodyPr wrap="square" lIns="109728" tIns="54864" rIns="109728" bIns="54864" anchor="t">
             <a:spAutoFit/>
           </a:bodyPr>
           <a:lstStyle/>
@@ -10339,7 +10394,7 @@
 </file>
 
 <file path=ppt/slides/slide5.xml><?xml version="1.0" encoding="utf-8"?>
-<p:sld xmlns:a="http://schemas.openxmlformats.org/drawingml/2006/main" xmlns:p="http://schemas.openxmlformats.org/presentationml/2006/main" xmlns:r="http://schemas.openxmlformats.org/officeDocument/2006/relationships">
+<p:sld xmlns:a="http://schemas.openxmlformats.org/drawingml/2006/main" xmlns:r="http://schemas.openxmlformats.org/officeDocument/2006/relationships" xmlns:p="http://schemas.openxmlformats.org/presentationml/2006/main">
   <p:cSld>
     <p:spTree>
       <p:nvGrpSpPr>
@@ -10347,7 +10402,14 @@
         <p:cNvGrpSpPr/>
         <p:nvPr/>
       </p:nvGrpSpPr>
-      <p:grpSpPr/>
+      <p:grpSpPr>
+        <a:xfrm>
+          <a:off x="0" y="0"/>
+          <a:ext cx="0" cy="0"/>
+          <a:chOff x="0" y="0"/>
+          <a:chExt cx="0" cy="0"/>
+        </a:xfrm>
+      </p:grpSpPr>
       <p:sp>
         <p:nvSpPr>
           <p:cNvPr id="2" name="Rectangle 1"/>
@@ -10389,6 +10451,7 @@
           <a:lstStyle/>
           <a:p>
             <a:pPr algn="ctr"/>
+            <a:endParaRPr/>
           </a:p>
         </p:txBody>
       </p:sp>
@@ -10433,6 +10496,7 @@
           <a:lstStyle/>
           <a:p>
             <a:pPr algn="ctr"/>
+            <a:endParaRPr/>
           </a:p>
         </p:txBody>
       </p:sp>
@@ -10453,7 +10517,7 @@
           <a:noFill/>
         </p:spPr>
         <p:txBody>
-          <a:bodyPr wrap="square" anchor="t" lIns="109728" rIns="109728" tIns="54864" bIns="54864">
+          <a:bodyPr wrap="square" lIns="109728" tIns="54864" rIns="109728" bIns="54864" anchor="t">
             <a:spAutoFit/>
           </a:bodyPr>
           <a:lstStyle/>
@@ -10495,7 +10559,7 @@
           <a:noFill/>
         </p:spPr>
         <p:txBody>
-          <a:bodyPr wrap="square" anchor="ctr" lIns="109728" rIns="109728" tIns="54864" bIns="54864">
+          <a:bodyPr wrap="square" lIns="109728" tIns="54864" rIns="109728" bIns="54864" anchor="ctr">
             <a:spAutoFit/>
           </a:bodyPr>
           <a:lstStyle/>
@@ -10561,6 +10625,7 @@
           <a:lstStyle/>
           <a:p>
             <a:pPr algn="ctr"/>
+            <a:endParaRPr/>
           </a:p>
         </p:txBody>
       </p:sp>
@@ -10581,7 +10646,7 @@
           <a:noFill/>
         </p:spPr>
         <p:txBody>
-          <a:bodyPr wrap="square" anchor="ctr" lIns="109728" rIns="109728" tIns="54864" bIns="54864">
+          <a:bodyPr wrap="square" lIns="109728" tIns="54864" rIns="109728" bIns="54864" anchor="ctr">
             <a:spAutoFit/>
           </a:bodyPr>
           <a:lstStyle/>
@@ -10623,7 +10688,7 @@
           <a:noFill/>
         </p:spPr>
         <p:txBody>
-          <a:bodyPr wrap="square" anchor="ctr" lIns="109728" rIns="109728" tIns="54864" bIns="54864">
+          <a:bodyPr wrap="square" lIns="109728" tIns="54864" rIns="109728" bIns="54864" anchor="ctr">
             <a:spAutoFit/>
           </a:bodyPr>
           <a:lstStyle/>
@@ -10673,13 +10738,6 @@
             </a:solidFill>
           </a:ln>
           <a:effectLst/>
-          <a:effectLst>
-            <a:outerShdw blurRad="60000" dist="25000" dir="5400000" rotWithShape="0">
-              <a:srgbClr val="1A1A2E">
-                <a:alpha val="22000"/>
-              </a:srgbClr>
-            </a:outerShdw>
-          </a:effectLst>
         </p:spPr>
         <p:style>
           <a:lnRef idx="1">
@@ -10700,6 +10758,7 @@
           <a:lstStyle/>
           <a:p>
             <a:pPr algn="ctr"/>
+            <a:endParaRPr/>
           </a:p>
         </p:txBody>
       </p:sp>
@@ -10744,6 +10803,7 @@
           <a:lstStyle/>
           <a:p>
             <a:pPr algn="ctr"/>
+            <a:endParaRPr/>
           </a:p>
         </p:txBody>
       </p:sp>
@@ -10764,7 +10824,7 @@
           <a:noFill/>
         </p:spPr>
         <p:txBody>
-          <a:bodyPr wrap="square" anchor="t" lIns="109728" rIns="109728" tIns="54864" bIns="54864">
+          <a:bodyPr wrap="square" lIns="109728" tIns="54864" rIns="109728" bIns="54864" anchor="t">
             <a:spAutoFit/>
           </a:bodyPr>
           <a:lstStyle/>
@@ -10833,13 +10893,6 @@
             </a:solidFill>
           </a:ln>
           <a:effectLst/>
-          <a:effectLst>
-            <a:outerShdw blurRad="60000" dist="25000" dir="5400000" rotWithShape="0">
-              <a:srgbClr val="1A1A2E">
-                <a:alpha val="22000"/>
-              </a:srgbClr>
-            </a:outerShdw>
-          </a:effectLst>
         </p:spPr>
         <p:style>
           <a:lnRef idx="1">
@@ -10860,6 +10913,7 @@
           <a:lstStyle/>
           <a:p>
             <a:pPr algn="ctr"/>
+            <a:endParaRPr/>
           </a:p>
         </p:txBody>
       </p:sp>
@@ -10904,6 +10958,7 @@
           <a:lstStyle/>
           <a:p>
             <a:pPr algn="ctr"/>
+            <a:endParaRPr/>
           </a:p>
         </p:txBody>
       </p:sp>
@@ -10924,7 +10979,7 @@
           <a:noFill/>
         </p:spPr>
         <p:txBody>
-          <a:bodyPr wrap="square" anchor="t" lIns="109728" rIns="109728" tIns="54864" bIns="54864">
+          <a:bodyPr wrap="square" lIns="109728" tIns="54864" rIns="109728" bIns="54864" anchor="t">
             <a:spAutoFit/>
           </a:bodyPr>
           <a:lstStyle/>
@@ -10977,7 +11032,7 @@
 </file>
 
 <file path=ppt/slides/slide6.xml><?xml version="1.0" encoding="utf-8"?>
-<p:sld xmlns:a="http://schemas.openxmlformats.org/drawingml/2006/main" xmlns:p="http://schemas.openxmlformats.org/presentationml/2006/main" xmlns:r="http://schemas.openxmlformats.org/officeDocument/2006/relationships">
+<p:sld xmlns:a="http://schemas.openxmlformats.org/drawingml/2006/main" xmlns:r="http://schemas.openxmlformats.org/officeDocument/2006/relationships" xmlns:p="http://schemas.openxmlformats.org/presentationml/2006/main">
   <p:cSld>
     <p:spTree>
       <p:nvGrpSpPr>
@@ -10985,7 +11040,14 @@
         <p:cNvGrpSpPr/>
         <p:nvPr/>
       </p:nvGrpSpPr>
-      <p:grpSpPr/>
+      <p:grpSpPr>
+        <a:xfrm>
+          <a:off x="0" y="0"/>
+          <a:ext cx="0" cy="0"/>
+          <a:chOff x="0" y="0"/>
+          <a:chExt cx="0" cy="0"/>
+        </a:xfrm>
+      </p:grpSpPr>
       <p:sp>
         <p:nvSpPr>
           <p:cNvPr id="2" name="Rectangle 1"/>
@@ -11027,6 +11089,7 @@
           <a:lstStyle/>
           <a:p>
             <a:pPr algn="ctr"/>
+            <a:endParaRPr/>
           </a:p>
         </p:txBody>
       </p:sp>
@@ -11071,6 +11134,7 @@
           <a:lstStyle/>
           <a:p>
             <a:pPr algn="ctr"/>
+            <a:endParaRPr/>
           </a:p>
         </p:txBody>
       </p:sp>
@@ -11091,7 +11155,7 @@
           <a:noFill/>
         </p:spPr>
         <p:txBody>
-          <a:bodyPr wrap="square" anchor="t" lIns="109728" rIns="109728" tIns="54864" bIns="54864">
+          <a:bodyPr wrap="square" lIns="109728" tIns="54864" rIns="109728" bIns="54864" anchor="t">
             <a:spAutoFit/>
           </a:bodyPr>
           <a:lstStyle/>
@@ -11133,7 +11197,7 @@
           <a:noFill/>
         </p:spPr>
         <p:txBody>
-          <a:bodyPr wrap="square" anchor="ctr" lIns="109728" rIns="109728" tIns="54864" bIns="54864">
+          <a:bodyPr wrap="square" lIns="109728" tIns="54864" rIns="109728" bIns="54864" anchor="ctr">
             <a:spAutoFit/>
           </a:bodyPr>
           <a:lstStyle/>
@@ -11199,6 +11263,7 @@
           <a:lstStyle/>
           <a:p>
             <a:pPr algn="ctr"/>
+            <a:endParaRPr/>
           </a:p>
         </p:txBody>
       </p:sp>
@@ -11219,7 +11284,7 @@
           <a:noFill/>
         </p:spPr>
         <p:txBody>
-          <a:bodyPr wrap="square" anchor="ctr" lIns="109728" rIns="109728" tIns="54864" bIns="54864">
+          <a:bodyPr wrap="square" lIns="109728" tIns="54864" rIns="109728" bIns="54864" anchor="ctr">
             <a:spAutoFit/>
           </a:bodyPr>
           <a:lstStyle/>
@@ -11261,7 +11326,7 @@
           <a:noFill/>
         </p:spPr>
         <p:txBody>
-          <a:bodyPr wrap="square" anchor="ctr" lIns="109728" rIns="109728" tIns="54864" bIns="54864">
+          <a:bodyPr wrap="square" lIns="109728" tIns="54864" rIns="109728" bIns="54864" anchor="ctr">
             <a:spAutoFit/>
           </a:bodyPr>
           <a:lstStyle/>
@@ -11311,13 +11376,6 @@
             </a:solidFill>
           </a:ln>
           <a:effectLst/>
-          <a:effectLst>
-            <a:outerShdw blurRad="60000" dist="25000" dir="5400000" rotWithShape="0">
-              <a:srgbClr val="1A1A2E">
-                <a:alpha val="22000"/>
-              </a:srgbClr>
-            </a:outerShdw>
-          </a:effectLst>
         </p:spPr>
         <p:style>
           <a:lnRef idx="1">
@@ -11338,6 +11396,7 @@
           <a:lstStyle/>
           <a:p>
             <a:pPr algn="ctr"/>
+            <a:endParaRPr/>
           </a:p>
         </p:txBody>
       </p:sp>
@@ -11382,6 +11441,7 @@
           <a:lstStyle/>
           <a:p>
             <a:pPr algn="ctr"/>
+            <a:endParaRPr/>
           </a:p>
         </p:txBody>
       </p:sp>
@@ -11402,7 +11462,7 @@
           <a:noFill/>
         </p:spPr>
         <p:txBody>
-          <a:bodyPr wrap="square" anchor="t" lIns="109728" rIns="109728" tIns="54864" bIns="54864">
+          <a:bodyPr wrap="square" lIns="109728" tIns="54864" rIns="109728" bIns="54864" anchor="t">
             <a:spAutoFit/>
           </a:bodyPr>
           <a:lstStyle/>
@@ -11471,13 +11531,6 @@
             </a:solidFill>
           </a:ln>
           <a:effectLst/>
-          <a:effectLst>
-            <a:outerShdw blurRad="60000" dist="25000" dir="5400000" rotWithShape="0">
-              <a:srgbClr val="1A1A2E">
-                <a:alpha val="22000"/>
-              </a:srgbClr>
-            </a:outerShdw>
-          </a:effectLst>
         </p:spPr>
         <p:style>
           <a:lnRef idx="1">
@@ -11498,6 +11551,7 @@
           <a:lstStyle/>
           <a:p>
             <a:pPr algn="ctr"/>
+            <a:endParaRPr/>
           </a:p>
         </p:txBody>
       </p:sp>
@@ -11542,6 +11596,7 @@
           <a:lstStyle/>
           <a:p>
             <a:pPr algn="ctr"/>
+            <a:endParaRPr/>
           </a:p>
         </p:txBody>
       </p:sp>
@@ -11562,7 +11617,7 @@
           <a:noFill/>
         </p:spPr>
         <p:txBody>
-          <a:bodyPr wrap="square" anchor="t" lIns="109728" rIns="109728" tIns="54864" bIns="54864">
+          <a:bodyPr wrap="square" lIns="109728" tIns="54864" rIns="109728" bIns="54864" anchor="t">
             <a:spAutoFit/>
           </a:bodyPr>
           <a:lstStyle/>
@@ -11631,13 +11686,6 @@
             </a:solidFill>
           </a:ln>
           <a:effectLst/>
-          <a:effectLst>
-            <a:outerShdw blurRad="60000" dist="25000" dir="5400000" rotWithShape="0">
-              <a:srgbClr val="1A1A2E">
-                <a:alpha val="22000"/>
-              </a:srgbClr>
-            </a:outerShdw>
-          </a:effectLst>
         </p:spPr>
         <p:style>
           <a:lnRef idx="1">
@@ -11658,6 +11706,7 @@
           <a:lstStyle/>
           <a:p>
             <a:pPr algn="ctr"/>
+            <a:endParaRPr/>
           </a:p>
         </p:txBody>
       </p:sp>
@@ -11702,6 +11751,7 @@
           <a:lstStyle/>
           <a:p>
             <a:pPr algn="ctr"/>
+            <a:endParaRPr/>
           </a:p>
         </p:txBody>
       </p:sp>
@@ -11722,7 +11772,7 @@
           <a:noFill/>
         </p:spPr>
         <p:txBody>
-          <a:bodyPr wrap="square" anchor="t" lIns="109728" rIns="109728" tIns="54864" bIns="54864">
+          <a:bodyPr wrap="square" lIns="109728" tIns="54864" rIns="109728" bIns="54864" anchor="t">
             <a:spAutoFit/>
           </a:bodyPr>
           <a:lstStyle/>
@@ -11791,13 +11841,6 @@
             </a:solidFill>
           </a:ln>
           <a:effectLst/>
-          <a:effectLst>
-            <a:outerShdw blurRad="60000" dist="25000" dir="5400000" rotWithShape="0">
-              <a:srgbClr val="1A1A2E">
-                <a:alpha val="22000"/>
-              </a:srgbClr>
-            </a:outerShdw>
-          </a:effectLst>
         </p:spPr>
         <p:style>
           <a:lnRef idx="1">
@@ -11818,6 +11861,7 @@
           <a:lstStyle/>
           <a:p>
             <a:pPr algn="ctr"/>
+            <a:endParaRPr/>
           </a:p>
         </p:txBody>
       </p:sp>
@@ -11862,6 +11906,7 @@
           <a:lstStyle/>
           <a:p>
             <a:pPr algn="ctr"/>
+            <a:endParaRPr/>
           </a:p>
         </p:txBody>
       </p:sp>
@@ -11882,7 +11927,7 @@
           <a:noFill/>
         </p:spPr>
         <p:txBody>
-          <a:bodyPr wrap="square" anchor="t" lIns="109728" rIns="109728" tIns="54864" bIns="54864">
+          <a:bodyPr wrap="square" lIns="109728" tIns="54864" rIns="109728" bIns="54864" anchor="t">
             <a:spAutoFit/>
           </a:bodyPr>
           <a:lstStyle/>
@@ -11935,7 +11980,7 @@
 </file>
 
 <file path=ppt/slides/slide7.xml><?xml version="1.0" encoding="utf-8"?>
-<p:sld xmlns:a="http://schemas.openxmlformats.org/drawingml/2006/main" xmlns:p="http://schemas.openxmlformats.org/presentationml/2006/main" xmlns:r="http://schemas.openxmlformats.org/officeDocument/2006/relationships">
+<p:sld xmlns:a="http://schemas.openxmlformats.org/drawingml/2006/main" xmlns:r="http://schemas.openxmlformats.org/officeDocument/2006/relationships" xmlns:p="http://schemas.openxmlformats.org/presentationml/2006/main">
   <p:cSld>
     <p:spTree>
       <p:nvGrpSpPr>
@@ -11943,7 +11988,14 @@
         <p:cNvGrpSpPr/>
         <p:nvPr/>
       </p:nvGrpSpPr>
-      <p:grpSpPr/>
+      <p:grpSpPr>
+        <a:xfrm>
+          <a:off x="0" y="0"/>
+          <a:ext cx="0" cy="0"/>
+          <a:chOff x="0" y="0"/>
+          <a:chExt cx="0" cy="0"/>
+        </a:xfrm>
+      </p:grpSpPr>
       <p:sp>
         <p:nvSpPr>
           <p:cNvPr id="2" name="Rectangle 1"/>
@@ -11985,6 +12037,7 @@
           <a:lstStyle/>
           <a:p>
             <a:pPr algn="ctr"/>
+            <a:endParaRPr/>
           </a:p>
         </p:txBody>
       </p:sp>
@@ -12029,6 +12082,7 @@
           <a:lstStyle/>
           <a:p>
             <a:pPr algn="ctr"/>
+            <a:endParaRPr/>
           </a:p>
         </p:txBody>
       </p:sp>
@@ -12049,7 +12103,7 @@
           <a:noFill/>
         </p:spPr>
         <p:txBody>
-          <a:bodyPr wrap="square" anchor="t" lIns="109728" rIns="109728" tIns="54864" bIns="54864">
+          <a:bodyPr wrap="square" lIns="109728" tIns="54864" rIns="109728" bIns="54864" anchor="t">
             <a:spAutoFit/>
           </a:bodyPr>
           <a:lstStyle/>
@@ -12091,7 +12145,7 @@
           <a:noFill/>
         </p:spPr>
         <p:txBody>
-          <a:bodyPr wrap="square" anchor="ctr" lIns="109728" rIns="109728" tIns="54864" bIns="54864">
+          <a:bodyPr wrap="square" lIns="109728" tIns="54864" rIns="109728" bIns="54864" anchor="ctr">
             <a:spAutoFit/>
           </a:bodyPr>
           <a:lstStyle/>
@@ -12157,6 +12211,7 @@
           <a:lstStyle/>
           <a:p>
             <a:pPr algn="ctr"/>
+            <a:endParaRPr/>
           </a:p>
         </p:txBody>
       </p:sp>
@@ -12177,7 +12232,7 @@
           <a:noFill/>
         </p:spPr>
         <p:txBody>
-          <a:bodyPr wrap="square" anchor="ctr" lIns="109728" rIns="109728" tIns="54864" bIns="54864">
+          <a:bodyPr wrap="square" lIns="109728" tIns="54864" rIns="109728" bIns="54864" anchor="ctr">
             <a:spAutoFit/>
           </a:bodyPr>
           <a:lstStyle/>
@@ -12219,7 +12274,7 @@
           <a:noFill/>
         </p:spPr>
         <p:txBody>
-          <a:bodyPr wrap="square" anchor="ctr" lIns="109728" rIns="109728" tIns="54864" bIns="54864">
+          <a:bodyPr wrap="square" lIns="109728" tIns="54864" rIns="109728" bIns="54864" anchor="ctr">
             <a:spAutoFit/>
           </a:bodyPr>
           <a:lstStyle/>
@@ -12269,13 +12324,6 @@
             </a:solidFill>
           </a:ln>
           <a:effectLst/>
-          <a:effectLst>
-            <a:outerShdw blurRad="60000" dist="25000" dir="5400000" rotWithShape="0">
-              <a:srgbClr val="1A1A2E">
-                <a:alpha val="22000"/>
-              </a:srgbClr>
-            </a:outerShdw>
-          </a:effectLst>
         </p:spPr>
         <p:style>
           <a:lnRef idx="1">
@@ -12296,6 +12344,7 @@
           <a:lstStyle/>
           <a:p>
             <a:pPr algn="ctr"/>
+            <a:endParaRPr/>
           </a:p>
         </p:txBody>
       </p:sp>
@@ -12340,6 +12389,7 @@
           <a:lstStyle/>
           <a:p>
             <a:pPr algn="ctr"/>
+            <a:endParaRPr/>
           </a:p>
         </p:txBody>
       </p:sp>
@@ -12360,7 +12410,7 @@
           <a:noFill/>
         </p:spPr>
         <p:txBody>
-          <a:bodyPr wrap="square" anchor="ctr" lIns="109728" rIns="109728" tIns="54864" bIns="54864">
+          <a:bodyPr wrap="square" lIns="109728" tIns="54864" rIns="109728" bIns="54864" anchor="ctr">
             <a:spAutoFit/>
           </a:bodyPr>
           <a:lstStyle/>
@@ -12402,7 +12452,7 @@
           <a:noFill/>
         </p:spPr>
         <p:txBody>
-          <a:bodyPr wrap="square" anchor="ctr" lIns="109728" rIns="109728" tIns="54864" bIns="54864">
+          <a:bodyPr wrap="square" lIns="109728" tIns="54864" rIns="109728" bIns="54864" anchor="ctr">
             <a:spAutoFit/>
           </a:bodyPr>
           <a:lstStyle/>
@@ -12468,6 +12518,7 @@
           <a:lstStyle/>
           <a:p>
             <a:pPr algn="ctr"/>
+            <a:endParaRPr/>
           </a:p>
         </p:txBody>
       </p:sp>
@@ -12496,13 +12547,6 @@
             </a:solidFill>
           </a:ln>
           <a:effectLst/>
-          <a:effectLst>
-            <a:outerShdw blurRad="60000" dist="25000" dir="5400000" rotWithShape="0">
-              <a:srgbClr val="1A1A2E">
-                <a:alpha val="22000"/>
-              </a:srgbClr>
-            </a:outerShdw>
-          </a:effectLst>
         </p:spPr>
         <p:style>
           <a:lnRef idx="1">
@@ -12523,6 +12567,7 @@
           <a:lstStyle/>
           <a:p>
             <a:pPr algn="ctr"/>
+            <a:endParaRPr/>
           </a:p>
         </p:txBody>
       </p:sp>
@@ -12567,6 +12612,7 @@
           <a:lstStyle/>
           <a:p>
             <a:pPr algn="ctr"/>
+            <a:endParaRPr/>
           </a:p>
         </p:txBody>
       </p:sp>
@@ -12587,7 +12633,7 @@
           <a:noFill/>
         </p:spPr>
         <p:txBody>
-          <a:bodyPr wrap="square" anchor="ctr" lIns="109728" rIns="109728" tIns="54864" bIns="54864">
+          <a:bodyPr wrap="square" lIns="109728" tIns="54864" rIns="109728" bIns="54864" anchor="ctr">
             <a:spAutoFit/>
           </a:bodyPr>
           <a:lstStyle/>
@@ -12629,7 +12675,7 @@
           <a:noFill/>
         </p:spPr>
         <p:txBody>
-          <a:bodyPr wrap="square" anchor="ctr" lIns="109728" rIns="109728" tIns="54864" bIns="54864">
+          <a:bodyPr wrap="square" lIns="109728" tIns="54864" rIns="109728" bIns="54864" anchor="ctr">
             <a:spAutoFit/>
           </a:bodyPr>
           <a:lstStyle/>
@@ -12695,6 +12741,7 @@
           <a:lstStyle/>
           <a:p>
             <a:pPr algn="ctr"/>
+            <a:endParaRPr/>
           </a:p>
         </p:txBody>
       </p:sp>
@@ -12723,13 +12770,6 @@
             </a:solidFill>
           </a:ln>
           <a:effectLst/>
-          <a:effectLst>
-            <a:outerShdw blurRad="60000" dist="25000" dir="5400000" rotWithShape="0">
-              <a:srgbClr val="1A1A2E">
-                <a:alpha val="22000"/>
-              </a:srgbClr>
-            </a:outerShdw>
-          </a:effectLst>
         </p:spPr>
         <p:style>
           <a:lnRef idx="1">
@@ -12750,6 +12790,7 @@
           <a:lstStyle/>
           <a:p>
             <a:pPr algn="ctr"/>
+            <a:endParaRPr/>
           </a:p>
         </p:txBody>
       </p:sp>
@@ -12794,6 +12835,7 @@
           <a:lstStyle/>
           <a:p>
             <a:pPr algn="ctr"/>
+            <a:endParaRPr/>
           </a:p>
         </p:txBody>
       </p:sp>
@@ -12814,7 +12856,7 @@
           <a:noFill/>
         </p:spPr>
         <p:txBody>
-          <a:bodyPr wrap="square" anchor="ctr" lIns="109728" rIns="109728" tIns="54864" bIns="54864">
+          <a:bodyPr wrap="square" lIns="109728" tIns="54864" rIns="109728" bIns="54864" anchor="ctr">
             <a:spAutoFit/>
           </a:bodyPr>
           <a:lstStyle/>
@@ -12856,7 +12898,7 @@
           <a:noFill/>
         </p:spPr>
         <p:txBody>
-          <a:bodyPr wrap="square" anchor="ctr" lIns="109728" rIns="109728" tIns="54864" bIns="54864">
+          <a:bodyPr wrap="square" lIns="109728" tIns="54864" rIns="109728" bIns="54864" anchor="ctr">
             <a:spAutoFit/>
           </a:bodyPr>
           <a:lstStyle/>
@@ -12922,6 +12964,7 @@
           <a:lstStyle/>
           <a:p>
             <a:pPr algn="ctr"/>
+            <a:endParaRPr/>
           </a:p>
         </p:txBody>
       </p:sp>
@@ -12950,13 +12993,6 @@
             </a:solidFill>
           </a:ln>
           <a:effectLst/>
-          <a:effectLst>
-            <a:outerShdw blurRad="60000" dist="25000" dir="5400000" rotWithShape="0">
-              <a:srgbClr val="1A1A2E">
-                <a:alpha val="22000"/>
-              </a:srgbClr>
-            </a:outerShdw>
-          </a:effectLst>
         </p:spPr>
         <p:style>
           <a:lnRef idx="1">
@@ -12977,6 +13013,7 @@
           <a:lstStyle/>
           <a:p>
             <a:pPr algn="ctr"/>
+            <a:endParaRPr/>
           </a:p>
         </p:txBody>
       </p:sp>
@@ -13021,6 +13058,7 @@
           <a:lstStyle/>
           <a:p>
             <a:pPr algn="ctr"/>
+            <a:endParaRPr/>
           </a:p>
         </p:txBody>
       </p:sp>
@@ -13041,7 +13079,7 @@
           <a:noFill/>
         </p:spPr>
         <p:txBody>
-          <a:bodyPr wrap="square" anchor="ctr" lIns="109728" rIns="109728" tIns="54864" bIns="54864">
+          <a:bodyPr wrap="square" lIns="109728" tIns="54864" rIns="109728" bIns="54864" anchor="ctr">
             <a:spAutoFit/>
           </a:bodyPr>
           <a:lstStyle/>
@@ -13083,7 +13121,7 @@
           <a:noFill/>
         </p:spPr>
         <p:txBody>
-          <a:bodyPr wrap="square" anchor="ctr" lIns="109728" rIns="109728" tIns="54864" bIns="54864">
+          <a:bodyPr wrap="square" lIns="109728" tIns="54864" rIns="109728" bIns="54864" anchor="ctr">
             <a:spAutoFit/>
           </a:bodyPr>
           <a:lstStyle/>
@@ -13125,7 +13163,7 @@
           <a:noFill/>
         </p:spPr>
         <p:txBody>
-          <a:bodyPr wrap="square" anchor="t" lIns="109728" rIns="109728" tIns="54864" bIns="54864">
+          <a:bodyPr wrap="square" lIns="109728" tIns="54864" rIns="109728" bIns="54864" anchor="t">
             <a:spAutoFit/>
           </a:bodyPr>
           <a:lstStyle/>
@@ -13159,7 +13197,7 @@
 </file>
 
 <file path=ppt/slides/slide8.xml><?xml version="1.0" encoding="utf-8"?>
-<p:sld xmlns:a="http://schemas.openxmlformats.org/drawingml/2006/main" xmlns:p="http://schemas.openxmlformats.org/presentationml/2006/main" xmlns:r="http://schemas.openxmlformats.org/officeDocument/2006/relationships">
+<p:sld xmlns:a="http://schemas.openxmlformats.org/drawingml/2006/main" xmlns:r="http://schemas.openxmlformats.org/officeDocument/2006/relationships" xmlns:p="http://schemas.openxmlformats.org/presentationml/2006/main">
   <p:cSld>
     <p:spTree>
       <p:nvGrpSpPr>
@@ -13167,7 +13205,14 @@
         <p:cNvGrpSpPr/>
         <p:nvPr/>
       </p:nvGrpSpPr>
-      <p:grpSpPr/>
+      <p:grpSpPr>
+        <a:xfrm>
+          <a:off x="0" y="0"/>
+          <a:ext cx="0" cy="0"/>
+          <a:chOff x="0" y="0"/>
+          <a:chExt cx="0" cy="0"/>
+        </a:xfrm>
+      </p:grpSpPr>
       <p:sp>
         <p:nvSpPr>
           <p:cNvPr id="2" name="Rectangle 1"/>
@@ -13209,6 +13254,7 @@
           <a:lstStyle/>
           <a:p>
             <a:pPr algn="ctr"/>
+            <a:endParaRPr/>
           </a:p>
         </p:txBody>
       </p:sp>
@@ -13253,6 +13299,7 @@
           <a:lstStyle/>
           <a:p>
             <a:pPr algn="ctr"/>
+            <a:endParaRPr/>
           </a:p>
         </p:txBody>
       </p:sp>
@@ -13273,7 +13320,7 @@
           <a:noFill/>
         </p:spPr>
         <p:txBody>
-          <a:bodyPr wrap="square" anchor="t" lIns="109728" rIns="109728" tIns="54864" bIns="54864">
+          <a:bodyPr wrap="square" lIns="109728" tIns="54864" rIns="109728" bIns="54864" anchor="t">
             <a:spAutoFit/>
           </a:bodyPr>
           <a:lstStyle/>
@@ -13315,7 +13362,7 @@
           <a:noFill/>
         </p:spPr>
         <p:txBody>
-          <a:bodyPr wrap="square" anchor="ctr" lIns="109728" rIns="109728" tIns="54864" bIns="54864">
+          <a:bodyPr wrap="square" lIns="109728" tIns="54864" rIns="109728" bIns="54864" anchor="ctr">
             <a:spAutoFit/>
           </a:bodyPr>
           <a:lstStyle/>
@@ -13381,6 +13428,7 @@
           <a:lstStyle/>
           <a:p>
             <a:pPr algn="ctr"/>
+            <a:endParaRPr/>
           </a:p>
         </p:txBody>
       </p:sp>
@@ -13401,7 +13449,7 @@
           <a:noFill/>
         </p:spPr>
         <p:txBody>
-          <a:bodyPr wrap="square" anchor="ctr" lIns="109728" rIns="109728" tIns="54864" bIns="54864">
+          <a:bodyPr wrap="square" lIns="109728" tIns="54864" rIns="109728" bIns="54864" anchor="ctr">
             <a:spAutoFit/>
           </a:bodyPr>
           <a:lstStyle/>
@@ -13443,7 +13491,7 @@
           <a:noFill/>
         </p:spPr>
         <p:txBody>
-          <a:bodyPr wrap="square" anchor="ctr" lIns="109728" rIns="109728" tIns="54864" bIns="54864">
+          <a:bodyPr wrap="square" lIns="109728" tIns="54864" rIns="109728" bIns="54864" anchor="ctr">
             <a:spAutoFit/>
           </a:bodyPr>
           <a:lstStyle/>
@@ -13511,6 +13559,7 @@
           <a:lstStyle/>
           <a:p>
             <a:pPr algn="ctr"/>
+            <a:endParaRPr/>
           </a:p>
         </p:txBody>
       </p:sp>
@@ -13551,7 +13600,7 @@
           </a:fontRef>
         </p:style>
         <p:txBody>
-          <a:bodyPr rtlCol="0" anchor="ctr" wrap="square" lIns="109728" rIns="109728" tIns="54864" bIns="54864"/>
+          <a:bodyPr wrap="square" lIns="109728" tIns="54864" rIns="109728" bIns="54864" rtlCol="0" anchor="ctr"/>
           <a:lstStyle/>
           <a:p>
             <a:pPr algn="ctr">
@@ -13591,7 +13640,7 @@
           <a:noFill/>
         </p:spPr>
         <p:txBody>
-          <a:bodyPr wrap="square" anchor="ctr" lIns="109728" rIns="109728" tIns="54864" bIns="54864">
+          <a:bodyPr wrap="square" lIns="109728" tIns="54864" rIns="109728" bIns="54864" anchor="ctr">
             <a:spAutoFit/>
           </a:bodyPr>
           <a:lstStyle/>
@@ -13678,6 +13727,7 @@
           <a:lstStyle/>
           <a:p>
             <a:pPr algn="ctr"/>
+            <a:endParaRPr/>
           </a:p>
         </p:txBody>
       </p:sp>
@@ -13718,7 +13768,7 @@
           </a:fontRef>
         </p:style>
         <p:txBody>
-          <a:bodyPr rtlCol="0" anchor="ctr" wrap="square" lIns="109728" rIns="109728" tIns="54864" bIns="54864"/>
+          <a:bodyPr wrap="square" lIns="109728" tIns="54864" rIns="109728" bIns="54864" rtlCol="0" anchor="ctr"/>
           <a:lstStyle/>
           <a:p>
             <a:pPr algn="ctr">
@@ -13758,7 +13808,7 @@
           <a:noFill/>
         </p:spPr>
         <p:txBody>
-          <a:bodyPr wrap="square" anchor="ctr" lIns="109728" rIns="109728" tIns="54864" bIns="54864">
+          <a:bodyPr wrap="square" lIns="109728" tIns="54864" rIns="109728" bIns="54864" anchor="ctr">
             <a:spAutoFit/>
           </a:bodyPr>
           <a:lstStyle/>
@@ -13845,6 +13895,7 @@
           <a:lstStyle/>
           <a:p>
             <a:pPr algn="ctr"/>
+            <a:endParaRPr/>
           </a:p>
         </p:txBody>
       </p:sp>
@@ -13885,7 +13936,7 @@
           </a:fontRef>
         </p:style>
         <p:txBody>
-          <a:bodyPr rtlCol="0" anchor="ctr" wrap="square" lIns="109728" rIns="109728" tIns="54864" bIns="54864"/>
+          <a:bodyPr wrap="square" lIns="109728" tIns="54864" rIns="109728" bIns="54864" rtlCol="0" anchor="ctr"/>
           <a:lstStyle/>
           <a:p>
             <a:pPr algn="ctr">
@@ -13925,7 +13976,7 @@
           <a:noFill/>
         </p:spPr>
         <p:txBody>
-          <a:bodyPr wrap="square" anchor="ctr" lIns="109728" rIns="109728" tIns="54864" bIns="54864">
+          <a:bodyPr wrap="square" lIns="109728" tIns="54864" rIns="109728" bIns="54864" anchor="ctr">
             <a:spAutoFit/>
           </a:bodyPr>
           <a:lstStyle/>
@@ -14012,6 +14063,7 @@
           <a:lstStyle/>
           <a:p>
             <a:pPr algn="ctr"/>
+            <a:endParaRPr/>
           </a:p>
         </p:txBody>
       </p:sp>
@@ -14052,7 +14104,7 @@
           </a:fontRef>
         </p:style>
         <p:txBody>
-          <a:bodyPr rtlCol="0" anchor="ctr" wrap="square" lIns="109728" rIns="109728" tIns="54864" bIns="54864"/>
+          <a:bodyPr wrap="square" lIns="109728" tIns="54864" rIns="109728" bIns="54864" rtlCol="0" anchor="ctr"/>
           <a:lstStyle/>
           <a:p>
             <a:pPr algn="ctr">
@@ -14092,7 +14144,7 @@
           <a:noFill/>
         </p:spPr>
         <p:txBody>
-          <a:bodyPr wrap="square" anchor="ctr" lIns="109728" rIns="109728" tIns="54864" bIns="54864">
+          <a:bodyPr wrap="square" lIns="109728" tIns="54864" rIns="109728" bIns="54864" anchor="ctr">
             <a:spAutoFit/>
           </a:bodyPr>
           <a:lstStyle/>
@@ -14145,7 +14197,7 @@
 </file>
 
 <file path=ppt/slides/slide9.xml><?xml version="1.0" encoding="utf-8"?>
-<p:sld xmlns:a="http://schemas.openxmlformats.org/drawingml/2006/main" xmlns:p="http://schemas.openxmlformats.org/presentationml/2006/main" xmlns:r="http://schemas.openxmlformats.org/officeDocument/2006/relationships">
+<p:sld xmlns:a="http://schemas.openxmlformats.org/drawingml/2006/main" xmlns:r="http://schemas.openxmlformats.org/officeDocument/2006/relationships" xmlns:p="http://schemas.openxmlformats.org/presentationml/2006/main">
   <p:cSld>
     <p:spTree>
       <p:nvGrpSpPr>
@@ -14153,7 +14205,14 @@
         <p:cNvGrpSpPr/>
         <p:nvPr/>
       </p:nvGrpSpPr>
-      <p:grpSpPr/>
+      <p:grpSpPr>
+        <a:xfrm>
+          <a:off x="0" y="0"/>
+          <a:ext cx="0" cy="0"/>
+          <a:chOff x="0" y="0"/>
+          <a:chExt cx="0" cy="0"/>
+        </a:xfrm>
+      </p:grpSpPr>
       <p:sp>
         <p:nvSpPr>
           <p:cNvPr id="2" name="Rectangle 1"/>
@@ -14195,6 +14254,7 @@
           <a:lstStyle/>
           <a:p>
             <a:pPr algn="ctr"/>
+            <a:endParaRPr/>
           </a:p>
         </p:txBody>
       </p:sp>
@@ -14239,6 +14299,7 @@
           <a:lstStyle/>
           <a:p>
             <a:pPr algn="ctr"/>
+            <a:endParaRPr/>
           </a:p>
         </p:txBody>
       </p:sp>
@@ -14259,7 +14320,7 @@
           <a:noFill/>
         </p:spPr>
         <p:txBody>
-          <a:bodyPr wrap="square" anchor="t" lIns="109728" rIns="109728" tIns="54864" bIns="54864">
+          <a:bodyPr wrap="square" lIns="109728" tIns="54864" rIns="109728" bIns="54864" anchor="t">
             <a:spAutoFit/>
           </a:bodyPr>
           <a:lstStyle/>
@@ -14301,7 +14362,7 @@
           <a:noFill/>
         </p:spPr>
         <p:txBody>
-          <a:bodyPr wrap="square" anchor="ctr" lIns="109728" rIns="109728" tIns="54864" bIns="54864">
+          <a:bodyPr wrap="square" lIns="109728" tIns="54864" rIns="109728" bIns="54864" anchor="ctr">
             <a:spAutoFit/>
           </a:bodyPr>
           <a:lstStyle/>
@@ -14367,6 +14428,7 @@
           <a:lstStyle/>
           <a:p>
             <a:pPr algn="ctr"/>
+            <a:endParaRPr/>
           </a:p>
         </p:txBody>
       </p:sp>
@@ -14387,7 +14449,7 @@
           <a:noFill/>
         </p:spPr>
         <p:txBody>
-          <a:bodyPr wrap="square" anchor="ctr" lIns="109728" rIns="109728" tIns="54864" bIns="54864">
+          <a:bodyPr wrap="square" lIns="109728" tIns="54864" rIns="109728" bIns="54864" anchor="ctr">
             <a:spAutoFit/>
           </a:bodyPr>
           <a:lstStyle/>
@@ -14429,7 +14491,7 @@
           <a:noFill/>
         </p:spPr>
         <p:txBody>
-          <a:bodyPr wrap="square" anchor="ctr" lIns="109728" rIns="109728" tIns="54864" bIns="54864">
+          <a:bodyPr wrap="square" lIns="109728" tIns="54864" rIns="109728" bIns="54864" anchor="ctr">
             <a:spAutoFit/>
           </a:bodyPr>
           <a:lstStyle/>
@@ -14497,6 +14559,7 @@
           <a:lstStyle/>
           <a:p>
             <a:pPr algn="ctr"/>
+            <a:endParaRPr/>
           </a:p>
         </p:txBody>
       </p:sp>
@@ -14537,7 +14600,7 @@
           </a:fontRef>
         </p:style>
         <p:txBody>
-          <a:bodyPr rtlCol="0" anchor="ctr" wrap="square" lIns="109728" rIns="109728" tIns="54864" bIns="54864"/>
+          <a:bodyPr wrap="square" lIns="109728" tIns="54864" rIns="109728" bIns="54864" rtlCol="0" anchor="ctr"/>
           <a:lstStyle/>
           <a:p>
             <a:pPr algn="ctr">
@@ -14577,7 +14640,7 @@
           <a:noFill/>
         </p:spPr>
         <p:txBody>
-          <a:bodyPr wrap="square" anchor="ctr" lIns="109728" rIns="109728" tIns="54864" bIns="54864">
+          <a:bodyPr wrap="square" lIns="109728" tIns="54864" rIns="109728" bIns="54864" anchor="ctr">
             <a:spAutoFit/>
           </a:bodyPr>
           <a:lstStyle/>
@@ -14664,6 +14727,7 @@
           <a:lstStyle/>
           <a:p>
             <a:pPr algn="ctr"/>
+            <a:endParaRPr/>
           </a:p>
         </p:txBody>
       </p:sp>
@@ -14704,7 +14768,7 @@
           </a:fontRef>
         </p:style>
         <p:txBody>
-          <a:bodyPr rtlCol="0" anchor="ctr" wrap="square" lIns="109728" rIns="109728" tIns="54864" bIns="54864"/>
+          <a:bodyPr wrap="square" lIns="109728" tIns="54864" rIns="109728" bIns="54864" rtlCol="0" anchor="ctr"/>
           <a:lstStyle/>
           <a:p>
             <a:pPr algn="ctr">
@@ -14744,7 +14808,7 @@
           <a:noFill/>
         </p:spPr>
         <p:txBody>
-          <a:bodyPr wrap="square" anchor="ctr" lIns="109728" rIns="109728" tIns="54864" bIns="54864">
+          <a:bodyPr wrap="square" lIns="109728" tIns="54864" rIns="109728" bIns="54864" anchor="ctr">
             <a:spAutoFit/>
           </a:bodyPr>
           <a:lstStyle/>
@@ -14831,6 +14895,7 @@
           <a:lstStyle/>
           <a:p>
             <a:pPr algn="ctr"/>
+            <a:endParaRPr/>
           </a:p>
         </p:txBody>
       </p:sp>
@@ -14871,7 +14936,7 @@
           </a:fontRef>
         </p:style>
         <p:txBody>
-          <a:bodyPr rtlCol="0" anchor="ctr" wrap="square" lIns="109728" rIns="109728" tIns="54864" bIns="54864"/>
+          <a:bodyPr wrap="square" lIns="109728" tIns="54864" rIns="109728" bIns="54864" rtlCol="0" anchor="ctr"/>
           <a:lstStyle/>
           <a:p>
             <a:pPr algn="ctr">
@@ -14911,7 +14976,7 @@
           <a:noFill/>
         </p:spPr>
         <p:txBody>
-          <a:bodyPr wrap="square" anchor="ctr" lIns="109728" rIns="109728" tIns="54864" bIns="54864">
+          <a:bodyPr wrap="square" lIns="109728" tIns="54864" rIns="109728" bIns="54864" anchor="ctr">
             <a:spAutoFit/>
           </a:bodyPr>
           <a:lstStyle/>
@@ -14998,6 +15063,7 @@
           <a:lstStyle/>
           <a:p>
             <a:pPr algn="ctr"/>
+            <a:endParaRPr/>
           </a:p>
         </p:txBody>
       </p:sp>
@@ -15038,7 +15104,7 @@
           </a:fontRef>
         </p:style>
         <p:txBody>
-          <a:bodyPr rtlCol="0" anchor="ctr" wrap="square" lIns="109728" rIns="109728" tIns="54864" bIns="54864"/>
+          <a:bodyPr wrap="square" lIns="109728" tIns="54864" rIns="109728" bIns="54864" rtlCol="0" anchor="ctr"/>
           <a:lstStyle/>
           <a:p>
             <a:pPr algn="ctr">
@@ -15078,7 +15144,7 @@
           <a:noFill/>
         </p:spPr>
         <p:txBody>
-          <a:bodyPr wrap="square" anchor="ctr" lIns="109728" rIns="109728" tIns="54864" bIns="54864">
+          <a:bodyPr wrap="square" lIns="109728" tIns="54864" rIns="109728" bIns="54864" anchor="ctr">
             <a:spAutoFit/>
           </a:bodyPr>
           <a:lstStyle/>
